--- a/PPT.pptx
+++ b/PPT.pptx
@@ -6,43 +6,44 @@
   </p:sldMasterIdLst>
   <p:sldIdLst>
     <p:sldId id="256" r:id="rId2"/>
-    <p:sldId id="257" r:id="rId3"/>
-    <p:sldId id="258" r:id="rId4"/>
-    <p:sldId id="259" r:id="rId5"/>
-    <p:sldId id="260" r:id="rId6"/>
-    <p:sldId id="261" r:id="rId7"/>
-    <p:sldId id="262" r:id="rId8"/>
-    <p:sldId id="263" r:id="rId9"/>
-    <p:sldId id="266" r:id="rId10"/>
-    <p:sldId id="267" r:id="rId11"/>
-    <p:sldId id="268" r:id="rId12"/>
-    <p:sldId id="269" r:id="rId13"/>
-    <p:sldId id="270" r:id="rId14"/>
-    <p:sldId id="271" r:id="rId15"/>
-    <p:sldId id="272" r:id="rId16"/>
-    <p:sldId id="273" r:id="rId17"/>
+    <p:sldId id="272" r:id="rId3"/>
+    <p:sldId id="275" r:id="rId4"/>
+    <p:sldId id="257" r:id="rId5"/>
+    <p:sldId id="258" r:id="rId6"/>
+    <p:sldId id="259" r:id="rId7"/>
+    <p:sldId id="260" r:id="rId8"/>
+    <p:sldId id="261" r:id="rId9"/>
+    <p:sldId id="262" r:id="rId10"/>
+    <p:sldId id="263" r:id="rId11"/>
+    <p:sldId id="266" r:id="rId12"/>
+    <p:sldId id="267" r:id="rId13"/>
+    <p:sldId id="268" r:id="rId14"/>
+    <p:sldId id="269" r:id="rId15"/>
+    <p:sldId id="270" r:id="rId16"/>
+    <p:sldId id="271" r:id="rId17"/>
+    <p:sldId id="273" r:id="rId18"/>
   </p:sldIdLst>
   <p:sldSz cx="18288000" cy="10287000"/>
   <p:notesSz cx="6858000" cy="9144000"/>
   <p:embeddedFontLst>
     <p:embeddedFont>
       <p:font typeface="Calibri" pitchFamily="34" charset="0"/>
-      <p:regular r:id="rId18"/>
-      <p:bold r:id="rId19"/>
-      <p:italic r:id="rId20"/>
-      <p:boldItalic r:id="rId21"/>
+      <p:regular r:id="rId19"/>
+      <p:bold r:id="rId20"/>
+      <p:italic r:id="rId21"/>
+      <p:boldItalic r:id="rId22"/>
     </p:embeddedFont>
     <p:embeddedFont>
       <p:font typeface="Times New Roman MT" charset="0"/>
-      <p:regular r:id="rId22"/>
+      <p:regular r:id="rId23"/>
     </p:embeddedFont>
     <p:embeddedFont>
       <p:font typeface="Times New Roman MT Bold" charset="0"/>
-      <p:regular r:id="rId23"/>
+      <p:regular r:id="rId24"/>
     </p:embeddedFont>
     <p:embeddedFont>
       <p:font typeface="Open Sans Bold" charset="0"/>
-      <p:regular r:id="rId24"/>
+      <p:regular r:id="rId25"/>
     </p:embeddedFont>
   </p:embeddedFontLst>
   <p:defaultTextStyle>
@@ -325,7 +326,7 @@
             <a:fld id="{1D8BD707-D9CF-40AE-B4C6-C98DA3205C09}" type="datetimeFigureOut">
               <a:rPr lang="en-US" smtClean="0"/>
               <a:pPr/>
-              <a:t>10/7/2025</a:t>
+              <a:t>10/10/2025</a:t>
             </a:fld>
             <a:endParaRPr lang="en-US"/>
           </a:p>
@@ -492,7 +493,7 @@
             <a:fld id="{1D8BD707-D9CF-40AE-B4C6-C98DA3205C09}" type="datetimeFigureOut">
               <a:rPr lang="en-US" smtClean="0"/>
               <a:pPr/>
-              <a:t>10/7/2025</a:t>
+              <a:t>10/10/2025</a:t>
             </a:fld>
             <a:endParaRPr lang="en-US"/>
           </a:p>
@@ -669,7 +670,7 @@
             <a:fld id="{1D8BD707-D9CF-40AE-B4C6-C98DA3205C09}" type="datetimeFigureOut">
               <a:rPr lang="en-US" smtClean="0"/>
               <a:pPr/>
-              <a:t>10/7/2025</a:t>
+              <a:t>10/10/2025</a:t>
             </a:fld>
             <a:endParaRPr lang="en-US"/>
           </a:p>
@@ -836,7 +837,7 @@
             <a:fld id="{1D8BD707-D9CF-40AE-B4C6-C98DA3205C09}" type="datetimeFigureOut">
               <a:rPr lang="en-US" smtClean="0"/>
               <a:pPr/>
-              <a:t>10/7/2025</a:t>
+              <a:t>10/10/2025</a:t>
             </a:fld>
             <a:endParaRPr lang="en-US"/>
           </a:p>
@@ -1079,7 +1080,7 @@
             <a:fld id="{1D8BD707-D9CF-40AE-B4C6-C98DA3205C09}" type="datetimeFigureOut">
               <a:rPr lang="en-US" smtClean="0"/>
               <a:pPr/>
-              <a:t>10/7/2025</a:t>
+              <a:t>10/10/2025</a:t>
             </a:fld>
             <a:endParaRPr lang="en-US"/>
           </a:p>
@@ -1364,7 +1365,7 @@
             <a:fld id="{1D8BD707-D9CF-40AE-B4C6-C98DA3205C09}" type="datetimeFigureOut">
               <a:rPr lang="en-US" smtClean="0"/>
               <a:pPr/>
-              <a:t>10/7/2025</a:t>
+              <a:t>10/10/2025</a:t>
             </a:fld>
             <a:endParaRPr lang="en-US"/>
           </a:p>
@@ -1783,7 +1784,7 @@
             <a:fld id="{1D8BD707-D9CF-40AE-B4C6-C98DA3205C09}" type="datetimeFigureOut">
               <a:rPr lang="en-US" smtClean="0"/>
               <a:pPr/>
-              <a:t>10/7/2025</a:t>
+              <a:t>10/10/2025</a:t>
             </a:fld>
             <a:endParaRPr lang="en-US"/>
           </a:p>
@@ -1898,7 +1899,7 @@
             <a:fld id="{1D8BD707-D9CF-40AE-B4C6-C98DA3205C09}" type="datetimeFigureOut">
               <a:rPr lang="en-US" smtClean="0"/>
               <a:pPr/>
-              <a:t>10/7/2025</a:t>
+              <a:t>10/10/2025</a:t>
             </a:fld>
             <a:endParaRPr lang="en-US"/>
           </a:p>
@@ -1990,7 +1991,7 @@
             <a:fld id="{1D8BD707-D9CF-40AE-B4C6-C98DA3205C09}" type="datetimeFigureOut">
               <a:rPr lang="en-US" smtClean="0"/>
               <a:pPr/>
-              <a:t>10/7/2025</a:t>
+              <a:t>10/10/2025</a:t>
             </a:fld>
             <a:endParaRPr lang="en-US"/>
           </a:p>
@@ -2264,7 +2265,7 @@
             <a:fld id="{1D8BD707-D9CF-40AE-B4C6-C98DA3205C09}" type="datetimeFigureOut">
               <a:rPr lang="en-US" smtClean="0"/>
               <a:pPr/>
-              <a:t>10/7/2025</a:t>
+              <a:t>10/10/2025</a:t>
             </a:fld>
             <a:endParaRPr lang="en-US"/>
           </a:p>
@@ -2514,7 +2515,7 @@
             <a:fld id="{1D8BD707-D9CF-40AE-B4C6-C98DA3205C09}" type="datetimeFigureOut">
               <a:rPr lang="en-US" smtClean="0"/>
               <a:pPr/>
-              <a:t>10/7/2025</a:t>
+              <a:t>10/10/2025</a:t>
             </a:fld>
             <a:endParaRPr lang="en-US"/>
           </a:p>
@@ -2724,7 +2725,7 @@
             <a:fld id="{1D8BD707-D9CF-40AE-B4C6-C98DA3205C09}" type="datetimeFigureOut">
               <a:rPr lang="en-US" smtClean="0"/>
               <a:pPr/>
-              <a:t>10/7/2025</a:t>
+              <a:t>10/10/2025</a:t>
             </a:fld>
             <a:endParaRPr lang="en-US"/>
           </a:p>
@@ -3386,7 +3387,7 @@
         <p:spPr>
           <a:xfrm>
             <a:off x="4633952" y="6383808"/>
-            <a:ext cx="12625348" cy="1782188"/>
+            <a:ext cx="12625348" cy="2616101"/>
           </a:xfrm>
           <a:prstGeom prst="rect">
             <a:avLst/>
@@ -3404,7 +3405,7 @@
               </a:lnSpc>
             </a:pPr>
             <a:r>
-              <a:rPr lang="en-US" sz="4835" b="1">
+              <a:rPr lang="en-US" sz="4835" b="1" dirty="0">
                 <a:solidFill>
                   <a:srgbClr val="000000"/>
                 </a:solidFill>
@@ -3423,7 +3424,7 @@
               </a:lnSpc>
             </a:pPr>
             <a:r>
-              <a:rPr lang="en-US" sz="4835" b="1">
+              <a:rPr lang="en-US" sz="4835" b="1" dirty="0">
                 <a:solidFill>
                   <a:srgbClr val="000000"/>
                 </a:solidFill>
@@ -3432,8 +3433,69 @@
                 <a:cs typeface="Times New Roman MT Bold"/>
                 <a:sym typeface="Times New Roman MT Bold"/>
               </a:rPr>
-              <a:t>Mentor : Pranaya</a:t>
-            </a:r>
+              <a:t>Mentor : </a:t>
+            </a:r>
+            <a:r>
+              <a:rPr lang="en-US" sz="4835" b="1" dirty="0" err="1" smtClean="0">
+                <a:solidFill>
+                  <a:srgbClr val="000000"/>
+                </a:solidFill>
+                <a:latin typeface="Times New Roman MT Bold"/>
+                <a:ea typeface="Times New Roman MT Bold"/>
+                <a:cs typeface="Times New Roman MT Bold"/>
+                <a:sym typeface="Times New Roman MT Bold"/>
+              </a:rPr>
+              <a:t>Pranaya</a:t>
+            </a:r>
+            <a:endParaRPr lang="en-US" sz="4835" b="1" dirty="0" smtClean="0">
+              <a:solidFill>
+                <a:srgbClr val="000000"/>
+              </a:solidFill>
+              <a:latin typeface="Times New Roman MT Bold"/>
+              <a:ea typeface="Times New Roman MT Bold"/>
+              <a:cs typeface="Times New Roman MT Bold"/>
+              <a:sym typeface="Times New Roman MT Bold"/>
+            </a:endParaRPr>
+          </a:p>
+          <a:p>
+            <a:pPr algn="ctr">
+              <a:lnSpc>
+                <a:spcPts val="6769"/>
+              </a:lnSpc>
+            </a:pPr>
+            <a:r>
+              <a:rPr lang="en-US" sz="4835" b="1" dirty="0" smtClean="0">
+                <a:solidFill>
+                  <a:srgbClr val="000000"/>
+                </a:solidFill>
+                <a:latin typeface="Times New Roman MT Bold"/>
+                <a:ea typeface="Times New Roman MT Bold"/>
+                <a:cs typeface="Times New Roman MT Bold"/>
+                <a:sym typeface="Times New Roman MT Bold"/>
+              </a:rPr>
+              <a:t>Infosys </a:t>
+            </a:r>
+            <a:r>
+              <a:rPr lang="en-US" sz="4835" b="1" dirty="0" err="1" smtClean="0">
+                <a:solidFill>
+                  <a:srgbClr val="000000"/>
+                </a:solidFill>
+                <a:latin typeface="Times New Roman MT Bold"/>
+                <a:ea typeface="Times New Roman MT Bold"/>
+                <a:cs typeface="Times New Roman MT Bold"/>
+                <a:sym typeface="Times New Roman MT Bold"/>
+              </a:rPr>
+              <a:t>SpringBoard</a:t>
+            </a:r>
+            <a:endParaRPr lang="en-US" sz="4835" b="1" dirty="0">
+              <a:solidFill>
+                <a:srgbClr val="000000"/>
+              </a:solidFill>
+              <a:latin typeface="Times New Roman MT Bold"/>
+              <a:ea typeface="Times New Roman MT Bold"/>
+              <a:cs typeface="Times New Roman MT Bold"/>
+              <a:sym typeface="Times New Roman MT Bold"/>
+            </a:endParaRPr>
           </a:p>
         </p:txBody>
       </p:sp>
@@ -3498,6 +3560,1291 @@
 </file>
 
 <file path=ppt/slides/slide10.xml><?xml version="1.0" encoding="utf-8"?>
+<p:sld xmlns:a="http://schemas.openxmlformats.org/drawingml/2006/main" xmlns:r="http://schemas.openxmlformats.org/officeDocument/2006/relationships" xmlns:p="http://schemas.openxmlformats.org/presentationml/2006/main">
+  <p:cSld>
+    <p:bg>
+      <p:bgPr>
+        <a:solidFill>
+          <a:srgbClr val="F6F3EB"/>
+        </a:solidFill>
+        <a:effectLst/>
+      </p:bgPr>
+    </p:bg>
+    <p:spTree>
+      <p:nvGrpSpPr>
+        <p:cNvPr id="1" name=""/>
+        <p:cNvGrpSpPr/>
+        <p:nvPr/>
+      </p:nvGrpSpPr>
+      <p:grpSpPr>
+        <a:xfrm>
+          <a:off x="0" y="0"/>
+          <a:ext cx="0" cy="0"/>
+          <a:chOff x="0" y="0"/>
+          <a:chExt cx="0" cy="0"/>
+        </a:xfrm>
+      </p:grpSpPr>
+      <p:sp>
+        <p:nvSpPr>
+          <p:cNvPr id="2" name="TextBox 2"/>
+          <p:cNvSpPr txBox="1"/>
+          <p:nvPr/>
+        </p:nvSpPr>
+        <p:spPr>
+          <a:xfrm>
+            <a:off x="866670" y="579438"/>
+            <a:ext cx="16230600" cy="1244594"/>
+          </a:xfrm>
+          <a:prstGeom prst="rect">
+            <a:avLst/>
+          </a:prstGeom>
+        </p:spPr>
+        <p:txBody>
+          <a:bodyPr lIns="0" tIns="0" rIns="0" bIns="0" rtlCol="0" anchor="t">
+            <a:spAutoFit/>
+          </a:bodyPr>
+          <a:lstStyle/>
+          <a:p>
+            <a:pPr algn="ctr">
+              <a:lnSpc>
+                <a:spcPts val="9100"/>
+              </a:lnSpc>
+            </a:pPr>
+            <a:r>
+              <a:rPr lang="en-US" sz="6500" b="1">
+                <a:solidFill>
+                  <a:srgbClr val="000000"/>
+                </a:solidFill>
+                <a:latin typeface="Times New Roman MT Bold"/>
+                <a:ea typeface="Times New Roman MT Bold"/>
+                <a:cs typeface="Times New Roman MT Bold"/>
+                <a:sym typeface="Times New Roman MT Bold"/>
+              </a:rPr>
+              <a:t>IMAGE PROCESSING</a:t>
+            </a:r>
+          </a:p>
+        </p:txBody>
+      </p:sp>
+      <p:sp>
+        <p:nvSpPr>
+          <p:cNvPr id="3" name="TextBox 3"/>
+          <p:cNvSpPr txBox="1"/>
+          <p:nvPr/>
+        </p:nvSpPr>
+        <p:spPr>
+          <a:xfrm>
+            <a:off x="866670" y="2199782"/>
+            <a:ext cx="15524543" cy="7646034"/>
+          </a:xfrm>
+          <a:prstGeom prst="rect">
+            <a:avLst/>
+          </a:prstGeom>
+        </p:spPr>
+        <p:txBody>
+          <a:bodyPr lIns="0" tIns="0" rIns="0" bIns="0" rtlCol="0" anchor="t">
+            <a:spAutoFit/>
+          </a:bodyPr>
+          <a:lstStyle/>
+          <a:p>
+            <a:pPr algn="just">
+              <a:lnSpc>
+                <a:spcPts val="4340"/>
+              </a:lnSpc>
+            </a:pPr>
+            <a:r>
+              <a:rPr lang="en-US" sz="3100" b="1">
+                <a:solidFill>
+                  <a:srgbClr val="000000"/>
+                </a:solidFill>
+                <a:latin typeface="Times New Roman MT Bold"/>
+                <a:ea typeface="Times New Roman MT Bold"/>
+                <a:cs typeface="Times New Roman MT Bold"/>
+                <a:sym typeface="Times New Roman MT Bold"/>
+              </a:rPr>
+              <a:t>Tools Used: </a:t>
+            </a:r>
+            <a:r>
+              <a:rPr lang="en-US" sz="3100">
+                <a:solidFill>
+                  <a:srgbClr val="000000"/>
+                </a:solidFill>
+                <a:latin typeface="Times New Roman MT"/>
+                <a:ea typeface="Times New Roman MT"/>
+                <a:cs typeface="Times New Roman MT"/>
+                <a:sym typeface="Times New Roman MT"/>
+              </a:rPr>
+              <a:t>OpenCV (Python)</a:t>
+            </a:r>
+          </a:p>
+          <a:p>
+            <a:pPr algn="just">
+              <a:lnSpc>
+                <a:spcPts val="4340"/>
+              </a:lnSpc>
+            </a:pPr>
+            <a:r>
+              <a:rPr lang="en-US" sz="3100" b="1">
+                <a:solidFill>
+                  <a:srgbClr val="000000"/>
+                </a:solidFill>
+                <a:latin typeface="Times New Roman MT Bold"/>
+                <a:ea typeface="Times New Roman MT Bold"/>
+                <a:cs typeface="Times New Roman MT Bold"/>
+                <a:sym typeface="Times New Roman MT Bold"/>
+              </a:rPr>
+              <a:t>Processing Steps:</a:t>
+            </a:r>
+          </a:p>
+          <a:p>
+            <a:pPr marL="669299" lvl="1" indent="-334650" algn="just">
+              <a:lnSpc>
+                <a:spcPts val="4340"/>
+              </a:lnSpc>
+              <a:buAutoNum type="arabicPeriod"/>
+            </a:pPr>
+            <a:r>
+              <a:rPr lang="en-US" sz="3100">
+                <a:solidFill>
+                  <a:srgbClr val="000000"/>
+                </a:solidFill>
+                <a:latin typeface="Times New Roman MT"/>
+                <a:ea typeface="Times New Roman MT"/>
+                <a:cs typeface="Times New Roman MT"/>
+                <a:sym typeface="Times New Roman MT"/>
+              </a:rPr>
+              <a:t>Grayscale Conversion → Convert PCB images to grayscale for easier computation.</a:t>
+            </a:r>
+          </a:p>
+          <a:p>
+            <a:pPr marL="669299" lvl="1" indent="-334650" algn="just">
+              <a:lnSpc>
+                <a:spcPts val="4340"/>
+              </a:lnSpc>
+              <a:buAutoNum type="arabicPeriod"/>
+            </a:pPr>
+            <a:r>
+              <a:rPr lang="en-US" sz="3100">
+                <a:solidFill>
+                  <a:srgbClr val="000000"/>
+                </a:solidFill>
+                <a:latin typeface="Times New Roman MT"/>
+                <a:ea typeface="Times New Roman MT"/>
+                <a:cs typeface="Times New Roman MT"/>
+                <a:sym typeface="Times New Roman MT"/>
+              </a:rPr>
+              <a:t>Image Subtraction → Subtract template PCB from test PCB to highlight differences (defects).</a:t>
+            </a:r>
+          </a:p>
+          <a:p>
+            <a:pPr marL="669299" lvl="1" indent="-334650" algn="just">
+              <a:lnSpc>
+                <a:spcPts val="4340"/>
+              </a:lnSpc>
+              <a:buAutoNum type="arabicPeriod"/>
+            </a:pPr>
+            <a:r>
+              <a:rPr lang="en-US" sz="3100">
+                <a:solidFill>
+                  <a:srgbClr val="000000"/>
+                </a:solidFill>
+                <a:latin typeface="Times New Roman MT"/>
+                <a:ea typeface="Times New Roman MT"/>
+                <a:cs typeface="Times New Roman MT"/>
+                <a:sym typeface="Times New Roman MT"/>
+              </a:rPr>
+              <a:t>Contour Detection → Identify boundaries of defects and draw bounding boxes.</a:t>
+            </a:r>
+          </a:p>
+          <a:p>
+            <a:pPr marL="669299" lvl="1" indent="-334650" algn="just">
+              <a:lnSpc>
+                <a:spcPts val="4340"/>
+              </a:lnSpc>
+              <a:buAutoNum type="arabicPeriod"/>
+            </a:pPr>
+            <a:r>
+              <a:rPr lang="en-US" sz="3100">
+                <a:solidFill>
+                  <a:srgbClr val="000000"/>
+                </a:solidFill>
+                <a:latin typeface="Times New Roman MT"/>
+                <a:ea typeface="Times New Roman MT"/>
+                <a:cs typeface="Times New Roman MT"/>
+                <a:sym typeface="Times New Roman MT"/>
+              </a:rPr>
+              <a:t>ROI Cropping → Extract defect regions as separate images ready for CNN training.</a:t>
+            </a:r>
+          </a:p>
+          <a:p>
+            <a:pPr algn="just">
+              <a:lnSpc>
+                <a:spcPts val="4340"/>
+              </a:lnSpc>
+            </a:pPr>
+            <a:r>
+              <a:rPr lang="en-US" sz="3100" b="1">
+                <a:solidFill>
+                  <a:srgbClr val="000000"/>
+                </a:solidFill>
+                <a:latin typeface="Times New Roman MT Bold"/>
+                <a:ea typeface="Times New Roman MT Bold"/>
+                <a:cs typeface="Times New Roman MT Bold"/>
+                <a:sym typeface="Times New Roman MT Bold"/>
+              </a:rPr>
+              <a:t>Result:</a:t>
+            </a:r>
+          </a:p>
+          <a:p>
+            <a:pPr marL="669299" lvl="1" indent="-334650" algn="just">
+              <a:lnSpc>
+                <a:spcPts val="4340"/>
+              </a:lnSpc>
+              <a:buFont typeface="Arial"/>
+              <a:buChar char="•"/>
+            </a:pPr>
+            <a:r>
+              <a:rPr lang="en-US" sz="3100">
+                <a:solidFill>
+                  <a:srgbClr val="000000"/>
+                </a:solidFill>
+                <a:latin typeface="Times New Roman MT"/>
+                <a:ea typeface="Times New Roman MT"/>
+                <a:cs typeface="Times New Roman MT"/>
+                <a:sym typeface="Times New Roman MT"/>
+              </a:rPr>
+              <a:t>Each defect region is isolated and ready for classification.</a:t>
+            </a:r>
+          </a:p>
+          <a:p>
+            <a:pPr marL="669299" lvl="1" indent="-334650" algn="just">
+              <a:lnSpc>
+                <a:spcPts val="4340"/>
+              </a:lnSpc>
+              <a:buFont typeface="Arial"/>
+              <a:buChar char="•"/>
+            </a:pPr>
+            <a:r>
+              <a:rPr lang="en-US" sz="3100">
+                <a:solidFill>
+                  <a:srgbClr val="000000"/>
+                </a:solidFill>
+                <a:latin typeface="Times New Roman MT"/>
+                <a:ea typeface="Times New Roman MT"/>
+                <a:cs typeface="Times New Roman MT"/>
+                <a:sym typeface="Times New Roman MT"/>
+              </a:rPr>
+              <a:t>Visuals can include:</a:t>
+            </a:r>
+          </a:p>
+          <a:p>
+            <a:pPr marL="1338598" lvl="2" indent="-446199" algn="just">
+              <a:lnSpc>
+                <a:spcPts val="4340"/>
+              </a:lnSpc>
+              <a:buAutoNum type="alphaLcPeriod"/>
+            </a:pPr>
+            <a:r>
+              <a:rPr lang="en-US" sz="3100">
+                <a:solidFill>
+                  <a:srgbClr val="000000"/>
+                </a:solidFill>
+                <a:latin typeface="Times New Roman MT"/>
+                <a:ea typeface="Times New Roman MT"/>
+                <a:cs typeface="Times New Roman MT"/>
+                <a:sym typeface="Times New Roman MT"/>
+              </a:rPr>
+              <a:t>Original PCB</a:t>
+            </a:r>
+          </a:p>
+          <a:p>
+            <a:pPr marL="1338598" lvl="2" indent="-446199" algn="just">
+              <a:lnSpc>
+                <a:spcPts val="4340"/>
+              </a:lnSpc>
+              <a:buAutoNum type="alphaLcPeriod"/>
+            </a:pPr>
+            <a:r>
+              <a:rPr lang="en-US" sz="3100">
+                <a:solidFill>
+                  <a:srgbClr val="000000"/>
+                </a:solidFill>
+                <a:latin typeface="Times New Roman MT"/>
+                <a:ea typeface="Times New Roman MT"/>
+                <a:cs typeface="Times New Roman MT"/>
+                <a:sym typeface="Times New Roman MT"/>
+              </a:rPr>
+              <a:t>Subtracted image showing defect areas</a:t>
+            </a:r>
+          </a:p>
+          <a:p>
+            <a:pPr marL="1338598" lvl="2" indent="-446199" algn="just">
+              <a:lnSpc>
+                <a:spcPts val="4340"/>
+              </a:lnSpc>
+              <a:buAutoNum type="alphaLcPeriod"/>
+            </a:pPr>
+            <a:r>
+              <a:rPr lang="en-US" sz="3100">
+                <a:solidFill>
+                  <a:srgbClr val="000000"/>
+                </a:solidFill>
+                <a:latin typeface="Times New Roman MT"/>
+                <a:ea typeface="Times New Roman MT"/>
+                <a:cs typeface="Times New Roman MT"/>
+                <a:sym typeface="Times New Roman MT"/>
+              </a:rPr>
+              <a:t>Final annotated image with bounding boxes </a:t>
+            </a:r>
+          </a:p>
+          <a:p>
+            <a:pPr marL="1338598" lvl="2" indent="-446199" algn="just">
+              <a:lnSpc>
+                <a:spcPts val="4340"/>
+              </a:lnSpc>
+              <a:buAutoNum type="alphaLcPeriod"/>
+            </a:pPr>
+            <a:r>
+              <a:rPr lang="en-US" sz="3100">
+                <a:solidFill>
+                  <a:srgbClr val="000000"/>
+                </a:solidFill>
+                <a:latin typeface="Times New Roman MT"/>
+                <a:ea typeface="Times New Roman MT"/>
+                <a:cs typeface="Times New Roman MT"/>
+                <a:sym typeface="Times New Roman MT"/>
+              </a:rPr>
+              <a:t>The download option of the annotated image  to download.</a:t>
+            </a:r>
+          </a:p>
+        </p:txBody>
+      </p:sp>
+      <p:sp>
+        <p:nvSpPr>
+          <p:cNvPr id="4" name="Freeform 4"/>
+          <p:cNvSpPr/>
+          <p:nvPr/>
+        </p:nvSpPr>
+        <p:spPr>
+          <a:xfrm>
+            <a:off x="13764167" y="5827621"/>
+            <a:ext cx="7315200" cy="2477783"/>
+          </a:xfrm>
+          <a:custGeom>
+            <a:avLst/>
+            <a:gdLst/>
+            <a:ahLst/>
+            <a:cxnLst/>
+            <a:rect l="l" t="t" r="r" b="b"/>
+            <a:pathLst>
+              <a:path w="7315200" h="2477783">
+                <a:moveTo>
+                  <a:pt x="0" y="0"/>
+                </a:moveTo>
+                <a:lnTo>
+                  <a:pt x="7315200" y="0"/>
+                </a:lnTo>
+                <a:lnTo>
+                  <a:pt x="7315200" y="2477784"/>
+                </a:lnTo>
+                <a:lnTo>
+                  <a:pt x="0" y="2477784"/>
+                </a:lnTo>
+                <a:lnTo>
+                  <a:pt x="0" y="0"/>
+                </a:lnTo>
+                <a:close/>
+              </a:path>
+            </a:pathLst>
+          </a:custGeom>
+          <a:blipFill>
+            <a:blip r:embed="rId2">
+              <a:extLst>
+                <a:ext uri="{96DAC541-7B7A-43D3-8B79-37D633B846F1}">
+                  <asvg:svgBlip xmlns="" xmlns:asvg="http://schemas.microsoft.com/office/drawing/2016/SVG/main" r:embed="rId3"/>
+                </a:ext>
+              </a:extLst>
+            </a:blip>
+            <a:stretch>
+              <a:fillRect/>
+            </a:stretch>
+          </a:blipFill>
+        </p:spPr>
+      </p:sp>
+      <p:grpSp>
+        <p:nvGrpSpPr>
+          <p:cNvPr id="5" name="Group 5"/>
+          <p:cNvGrpSpPr/>
+          <p:nvPr/>
+        </p:nvGrpSpPr>
+        <p:grpSpPr>
+          <a:xfrm>
+            <a:off x="15859155" y="0"/>
+            <a:ext cx="1562612" cy="1673225"/>
+            <a:chOff x="0" y="0"/>
+            <a:chExt cx="2083482" cy="2230967"/>
+          </a:xfrm>
+        </p:grpSpPr>
+        <p:grpSp>
+          <p:nvGrpSpPr>
+            <p:cNvPr id="6" name="Group 6"/>
+            <p:cNvGrpSpPr/>
+            <p:nvPr/>
+          </p:nvGrpSpPr>
+          <p:grpSpPr>
+            <a:xfrm>
+              <a:off x="75599" y="0"/>
+              <a:ext cx="1932284" cy="2230967"/>
+              <a:chOff x="0" y="0"/>
+              <a:chExt cx="703982" cy="812800"/>
+            </a:xfrm>
+          </p:grpSpPr>
+          <p:sp>
+            <p:nvSpPr>
+              <p:cNvPr id="7" name="Freeform 7"/>
+              <p:cNvSpPr/>
+              <p:nvPr/>
+            </p:nvSpPr>
+            <p:spPr>
+              <a:xfrm>
+                <a:off x="0" y="0"/>
+                <a:ext cx="703982" cy="812800"/>
+              </a:xfrm>
+              <a:custGeom>
+                <a:avLst/>
+                <a:gdLst/>
+                <a:ahLst/>
+                <a:cxnLst/>
+                <a:rect l="l" t="t" r="r" b="b"/>
+                <a:pathLst>
+                  <a:path w="703982" h="812800">
+                    <a:moveTo>
+                      <a:pt x="234787" y="793731"/>
+                    </a:moveTo>
+                    <a:cubicBezTo>
+                      <a:pt x="270879" y="805245"/>
+                      <a:pt x="311910" y="812800"/>
+                      <a:pt x="352180" y="812800"/>
+                    </a:cubicBezTo>
+                    <a:cubicBezTo>
+                      <a:pt x="392452" y="812800"/>
+                      <a:pt x="431204" y="806323"/>
+                      <a:pt x="466915" y="794809"/>
+                    </a:cubicBezTo>
+                    <a:cubicBezTo>
+                      <a:pt x="467675" y="794450"/>
+                      <a:pt x="468435" y="794450"/>
+                      <a:pt x="469194" y="794090"/>
+                    </a:cubicBezTo>
+                    <a:cubicBezTo>
+                      <a:pt x="603304" y="748035"/>
+                      <a:pt x="702082" y="626421"/>
+                      <a:pt x="703982" y="484298"/>
+                    </a:cubicBezTo>
+                    <a:lnTo>
+                      <a:pt x="703982" y="0"/>
+                    </a:lnTo>
+                    <a:lnTo>
+                      <a:pt x="0" y="0"/>
+                    </a:lnTo>
+                    <a:lnTo>
+                      <a:pt x="0" y="483939"/>
+                    </a:lnTo>
+                    <a:cubicBezTo>
+                      <a:pt x="1900" y="627140"/>
+                      <a:pt x="99158" y="748755"/>
+                      <a:pt x="234787" y="793731"/>
+                    </a:cubicBezTo>
+                    <a:close/>
+                  </a:path>
+                </a:pathLst>
+              </a:custGeom>
+              <a:solidFill>
+                <a:srgbClr val="9FC3D0"/>
+              </a:solidFill>
+            </p:spPr>
+          </p:sp>
+          <p:sp>
+            <p:nvSpPr>
+              <p:cNvPr id="8" name="TextBox 8"/>
+              <p:cNvSpPr txBox="1"/>
+              <p:nvPr/>
+            </p:nvSpPr>
+            <p:spPr>
+              <a:xfrm>
+                <a:off x="0" y="-47625"/>
+                <a:ext cx="703982" cy="733425"/>
+              </a:xfrm>
+              <a:prstGeom prst="rect">
+                <a:avLst/>
+              </a:prstGeom>
+            </p:spPr>
+            <p:txBody>
+              <a:bodyPr lIns="50800" tIns="50800" rIns="50800" bIns="50800" rtlCol="0" anchor="ctr"/>
+              <a:lstStyle/>
+              <a:p>
+                <a:pPr algn="ctr">
+                  <a:lnSpc>
+                    <a:spcPts val="2659"/>
+                  </a:lnSpc>
+                </a:pPr>
+                <a:endParaRPr/>
+              </a:p>
+            </p:txBody>
+          </p:sp>
+        </p:grpSp>
+        <p:sp>
+          <p:nvSpPr>
+            <p:cNvPr id="9" name="TextBox 9"/>
+            <p:cNvSpPr txBox="1"/>
+            <p:nvPr/>
+          </p:nvSpPr>
+          <p:spPr>
+            <a:xfrm>
+              <a:off x="0" y="437582"/>
+              <a:ext cx="2083482" cy="1241504"/>
+            </a:xfrm>
+            <a:prstGeom prst="rect">
+              <a:avLst/>
+            </a:prstGeom>
+          </p:spPr>
+          <p:txBody>
+            <a:bodyPr lIns="0" tIns="0" rIns="0" bIns="0" rtlCol="0" anchor="t">
+              <a:spAutoFit/>
+            </a:bodyPr>
+            <a:lstStyle/>
+            <a:p>
+              <a:pPr algn="ctr">
+                <a:lnSpc>
+                  <a:spcPts val="7805"/>
+                </a:lnSpc>
+              </a:pPr>
+              <a:r>
+                <a:rPr lang="en-US" sz="5575" b="1">
+                  <a:solidFill>
+                    <a:srgbClr val="000000"/>
+                  </a:solidFill>
+                  <a:latin typeface="Open Sans Bold"/>
+                  <a:ea typeface="Open Sans Bold"/>
+                  <a:cs typeface="Open Sans Bold"/>
+                  <a:sym typeface="Open Sans Bold"/>
+                </a:rPr>
+                <a:t>6</a:t>
+              </a:r>
+            </a:p>
+          </p:txBody>
+        </p:sp>
+      </p:grpSp>
+      <p:sp>
+        <p:nvSpPr>
+          <p:cNvPr id="10" name="Freeform 10"/>
+          <p:cNvSpPr/>
+          <p:nvPr/>
+        </p:nvSpPr>
+        <p:spPr>
+          <a:xfrm>
+            <a:off x="-2628900" y="-1449083"/>
+            <a:ext cx="7315200" cy="2477783"/>
+          </a:xfrm>
+          <a:custGeom>
+            <a:avLst/>
+            <a:gdLst/>
+            <a:ahLst/>
+            <a:cxnLst/>
+            <a:rect l="l" t="t" r="r" b="b"/>
+            <a:pathLst>
+              <a:path w="7315200" h="2477783">
+                <a:moveTo>
+                  <a:pt x="0" y="0"/>
+                </a:moveTo>
+                <a:lnTo>
+                  <a:pt x="7315200" y="0"/>
+                </a:lnTo>
+                <a:lnTo>
+                  <a:pt x="7315200" y="2477783"/>
+                </a:lnTo>
+                <a:lnTo>
+                  <a:pt x="0" y="2477783"/>
+                </a:lnTo>
+                <a:lnTo>
+                  <a:pt x="0" y="0"/>
+                </a:lnTo>
+                <a:close/>
+              </a:path>
+            </a:pathLst>
+          </a:custGeom>
+          <a:blipFill>
+            <a:blip r:embed="rId2">
+              <a:extLst>
+                <a:ext uri="{96DAC541-7B7A-43D3-8B79-37D633B846F1}">
+                  <asvg:svgBlip xmlns="" xmlns:asvg="http://schemas.microsoft.com/office/drawing/2016/SVG/main" r:embed="rId3"/>
+                </a:ext>
+              </a:extLst>
+            </a:blip>
+            <a:stretch>
+              <a:fillRect/>
+            </a:stretch>
+          </a:blipFill>
+        </p:spPr>
+      </p:sp>
+    </p:spTree>
+  </p:cSld>
+  <p:clrMapOvr>
+    <a:masterClrMapping/>
+  </p:clrMapOvr>
+</p:sld>
+</file>
+
+<file path=ppt/slides/slide11.xml><?xml version="1.0" encoding="utf-8"?>
+<p:sld xmlns:a="http://schemas.openxmlformats.org/drawingml/2006/main" xmlns:r="http://schemas.openxmlformats.org/officeDocument/2006/relationships" xmlns:p="http://schemas.openxmlformats.org/presentationml/2006/main">
+  <p:cSld>
+    <p:bg>
+      <p:bgPr>
+        <a:solidFill>
+          <a:srgbClr val="F6F3EB"/>
+        </a:solidFill>
+        <a:effectLst/>
+      </p:bgPr>
+    </p:bg>
+    <p:spTree>
+      <p:nvGrpSpPr>
+        <p:cNvPr id="1" name=""/>
+        <p:cNvGrpSpPr/>
+        <p:nvPr/>
+      </p:nvGrpSpPr>
+      <p:grpSpPr>
+        <a:xfrm>
+          <a:off x="0" y="0"/>
+          <a:ext cx="0" cy="0"/>
+          <a:chOff x="0" y="0"/>
+          <a:chExt cx="0" cy="0"/>
+        </a:xfrm>
+      </p:grpSpPr>
+      <p:sp>
+        <p:nvSpPr>
+          <p:cNvPr id="2" name="TextBox 2"/>
+          <p:cNvSpPr txBox="1"/>
+          <p:nvPr/>
+        </p:nvSpPr>
+        <p:spPr>
+          <a:xfrm>
+            <a:off x="1028700" y="-276225"/>
+            <a:ext cx="16230600" cy="1353179"/>
+          </a:xfrm>
+          <a:prstGeom prst="rect">
+            <a:avLst/>
+          </a:prstGeom>
+        </p:spPr>
+        <p:txBody>
+          <a:bodyPr lIns="0" tIns="0" rIns="0" bIns="0" rtlCol="0" anchor="t">
+            <a:spAutoFit/>
+          </a:bodyPr>
+          <a:lstStyle/>
+          <a:p>
+            <a:pPr algn="ctr">
+              <a:lnSpc>
+                <a:spcPts val="9940"/>
+              </a:lnSpc>
+            </a:pPr>
+            <a:r>
+              <a:rPr lang="en-US" sz="7100" b="1">
+                <a:solidFill>
+                  <a:srgbClr val="000000"/>
+                </a:solidFill>
+                <a:latin typeface="Times New Roman MT Bold"/>
+                <a:ea typeface="Times New Roman MT Bold"/>
+                <a:cs typeface="Times New Roman MT Bold"/>
+                <a:sym typeface="Times New Roman MT Bold"/>
+              </a:rPr>
+              <a:t>MODEL TRAINING</a:t>
+            </a:r>
+          </a:p>
+        </p:txBody>
+      </p:sp>
+      <p:sp>
+        <p:nvSpPr>
+          <p:cNvPr id="3" name="Freeform 3"/>
+          <p:cNvSpPr/>
+          <p:nvPr/>
+        </p:nvSpPr>
+        <p:spPr>
+          <a:xfrm>
+            <a:off x="13417488" y="6142174"/>
+            <a:ext cx="7315200" cy="2477783"/>
+          </a:xfrm>
+          <a:custGeom>
+            <a:avLst/>
+            <a:gdLst/>
+            <a:ahLst/>
+            <a:cxnLst/>
+            <a:rect l="l" t="t" r="r" b="b"/>
+            <a:pathLst>
+              <a:path w="7315200" h="2477783">
+                <a:moveTo>
+                  <a:pt x="0" y="0"/>
+                </a:moveTo>
+                <a:lnTo>
+                  <a:pt x="7315200" y="0"/>
+                </a:lnTo>
+                <a:lnTo>
+                  <a:pt x="7315200" y="2477783"/>
+                </a:lnTo>
+                <a:lnTo>
+                  <a:pt x="0" y="2477783"/>
+                </a:lnTo>
+                <a:lnTo>
+                  <a:pt x="0" y="0"/>
+                </a:lnTo>
+                <a:close/>
+              </a:path>
+            </a:pathLst>
+          </a:custGeom>
+          <a:blipFill>
+            <a:blip r:embed="rId2">
+              <a:extLst>
+                <a:ext uri="{96DAC541-7B7A-43D3-8B79-37D633B846F1}">
+                  <asvg:svgBlip xmlns="" xmlns:asvg="http://schemas.microsoft.com/office/drawing/2016/SVG/main" r:embed="rId3"/>
+                </a:ext>
+              </a:extLst>
+            </a:blip>
+            <a:stretch>
+              <a:fillRect/>
+            </a:stretch>
+          </a:blipFill>
+        </p:spPr>
+      </p:sp>
+      <p:grpSp>
+        <p:nvGrpSpPr>
+          <p:cNvPr id="4" name="Group 4"/>
+          <p:cNvGrpSpPr/>
+          <p:nvPr/>
+        </p:nvGrpSpPr>
+        <p:grpSpPr>
+          <a:xfrm>
+            <a:off x="15859155" y="0"/>
+            <a:ext cx="1562612" cy="1673225"/>
+            <a:chOff x="0" y="0"/>
+            <a:chExt cx="2083482" cy="2230967"/>
+          </a:xfrm>
+        </p:grpSpPr>
+        <p:grpSp>
+          <p:nvGrpSpPr>
+            <p:cNvPr id="5" name="Group 5"/>
+            <p:cNvGrpSpPr/>
+            <p:nvPr/>
+          </p:nvGrpSpPr>
+          <p:grpSpPr>
+            <a:xfrm>
+              <a:off x="75599" y="0"/>
+              <a:ext cx="1932284" cy="2230967"/>
+              <a:chOff x="0" y="0"/>
+              <a:chExt cx="703982" cy="812800"/>
+            </a:xfrm>
+          </p:grpSpPr>
+          <p:sp>
+            <p:nvSpPr>
+              <p:cNvPr id="6" name="Freeform 6"/>
+              <p:cNvSpPr/>
+              <p:nvPr/>
+            </p:nvSpPr>
+            <p:spPr>
+              <a:xfrm>
+                <a:off x="0" y="0"/>
+                <a:ext cx="703982" cy="812800"/>
+              </a:xfrm>
+              <a:custGeom>
+                <a:avLst/>
+                <a:gdLst/>
+                <a:ahLst/>
+                <a:cxnLst/>
+                <a:rect l="l" t="t" r="r" b="b"/>
+                <a:pathLst>
+                  <a:path w="703982" h="812800">
+                    <a:moveTo>
+                      <a:pt x="234787" y="793731"/>
+                    </a:moveTo>
+                    <a:cubicBezTo>
+                      <a:pt x="270879" y="805245"/>
+                      <a:pt x="311910" y="812800"/>
+                      <a:pt x="352180" y="812800"/>
+                    </a:cubicBezTo>
+                    <a:cubicBezTo>
+                      <a:pt x="392452" y="812800"/>
+                      <a:pt x="431204" y="806323"/>
+                      <a:pt x="466915" y="794809"/>
+                    </a:cubicBezTo>
+                    <a:cubicBezTo>
+                      <a:pt x="467675" y="794450"/>
+                      <a:pt x="468435" y="794450"/>
+                      <a:pt x="469194" y="794090"/>
+                    </a:cubicBezTo>
+                    <a:cubicBezTo>
+                      <a:pt x="603304" y="748035"/>
+                      <a:pt x="702082" y="626421"/>
+                      <a:pt x="703982" y="484298"/>
+                    </a:cubicBezTo>
+                    <a:lnTo>
+                      <a:pt x="703982" y="0"/>
+                    </a:lnTo>
+                    <a:lnTo>
+                      <a:pt x="0" y="0"/>
+                    </a:lnTo>
+                    <a:lnTo>
+                      <a:pt x="0" y="483939"/>
+                    </a:lnTo>
+                    <a:cubicBezTo>
+                      <a:pt x="1900" y="627140"/>
+                      <a:pt x="99158" y="748755"/>
+                      <a:pt x="234787" y="793731"/>
+                    </a:cubicBezTo>
+                    <a:close/>
+                  </a:path>
+                </a:pathLst>
+              </a:custGeom>
+              <a:solidFill>
+                <a:srgbClr val="9FC3D0"/>
+              </a:solidFill>
+            </p:spPr>
+          </p:sp>
+          <p:sp>
+            <p:nvSpPr>
+              <p:cNvPr id="7" name="TextBox 7"/>
+              <p:cNvSpPr txBox="1"/>
+              <p:nvPr/>
+            </p:nvSpPr>
+            <p:spPr>
+              <a:xfrm>
+                <a:off x="0" y="-47625"/>
+                <a:ext cx="703982" cy="733425"/>
+              </a:xfrm>
+              <a:prstGeom prst="rect">
+                <a:avLst/>
+              </a:prstGeom>
+            </p:spPr>
+            <p:txBody>
+              <a:bodyPr lIns="50800" tIns="50800" rIns="50800" bIns="50800" rtlCol="0" anchor="ctr"/>
+              <a:lstStyle/>
+              <a:p>
+                <a:pPr algn="ctr">
+                  <a:lnSpc>
+                    <a:spcPts val="2659"/>
+                  </a:lnSpc>
+                </a:pPr>
+                <a:endParaRPr/>
+              </a:p>
+            </p:txBody>
+          </p:sp>
+        </p:grpSp>
+        <p:sp>
+          <p:nvSpPr>
+            <p:cNvPr id="8" name="TextBox 8"/>
+            <p:cNvSpPr txBox="1"/>
+            <p:nvPr/>
+          </p:nvSpPr>
+          <p:spPr>
+            <a:xfrm>
+              <a:off x="0" y="437582"/>
+              <a:ext cx="2083482" cy="1241504"/>
+            </a:xfrm>
+            <a:prstGeom prst="rect">
+              <a:avLst/>
+            </a:prstGeom>
+          </p:spPr>
+          <p:txBody>
+            <a:bodyPr lIns="0" tIns="0" rIns="0" bIns="0" rtlCol="0" anchor="t">
+              <a:spAutoFit/>
+            </a:bodyPr>
+            <a:lstStyle/>
+            <a:p>
+              <a:pPr algn="ctr">
+                <a:lnSpc>
+                  <a:spcPts val="7805"/>
+                </a:lnSpc>
+              </a:pPr>
+              <a:r>
+                <a:rPr lang="en-US" sz="5575" b="1">
+                  <a:solidFill>
+                    <a:srgbClr val="000000"/>
+                  </a:solidFill>
+                  <a:latin typeface="Open Sans Bold"/>
+                  <a:ea typeface="Open Sans Bold"/>
+                  <a:cs typeface="Open Sans Bold"/>
+                  <a:sym typeface="Open Sans Bold"/>
+                </a:rPr>
+                <a:t>7</a:t>
+              </a:r>
+            </a:p>
+          </p:txBody>
+        </p:sp>
+      </p:grpSp>
+      <p:sp>
+        <p:nvSpPr>
+          <p:cNvPr id="9" name="TextBox 9"/>
+          <p:cNvSpPr txBox="1"/>
+          <p:nvPr/>
+        </p:nvSpPr>
+        <p:spPr>
+          <a:xfrm>
+            <a:off x="839777" y="943604"/>
+            <a:ext cx="16235311" cy="9648191"/>
+          </a:xfrm>
+          <a:prstGeom prst="rect">
+            <a:avLst/>
+          </a:prstGeom>
+        </p:spPr>
+        <p:txBody>
+          <a:bodyPr lIns="0" tIns="0" rIns="0" bIns="0" rtlCol="0" anchor="t">
+            <a:spAutoFit/>
+          </a:bodyPr>
+          <a:lstStyle/>
+          <a:p>
+            <a:pPr algn="l">
+              <a:lnSpc>
+                <a:spcPts val="4759"/>
+              </a:lnSpc>
+            </a:pPr>
+            <a:r>
+              <a:rPr lang="en-US" sz="3399" b="1">
+                <a:solidFill>
+                  <a:srgbClr val="000000"/>
+                </a:solidFill>
+                <a:latin typeface="Times New Roman MT Bold"/>
+                <a:ea typeface="Times New Roman MT Bold"/>
+                <a:cs typeface="Times New Roman MT Bold"/>
+                <a:sym typeface="Times New Roman MT Bold"/>
+              </a:rPr>
+              <a:t>Model Used:</a:t>
+            </a:r>
+          </a:p>
+          <a:p>
+            <a:pPr marL="734051" lvl="1" indent="-367026" algn="l">
+              <a:lnSpc>
+                <a:spcPts val="4759"/>
+              </a:lnSpc>
+              <a:spcBef>
+                <a:spcPct val="0"/>
+              </a:spcBef>
+              <a:buFont typeface="Arial"/>
+              <a:buChar char="•"/>
+            </a:pPr>
+            <a:r>
+              <a:rPr lang="en-US" sz="3399">
+                <a:solidFill>
+                  <a:srgbClr val="000000"/>
+                </a:solidFill>
+                <a:latin typeface="Times New Roman MT"/>
+                <a:ea typeface="Times New Roman MT"/>
+                <a:cs typeface="Times New Roman MT"/>
+                <a:sym typeface="Times New Roman MT"/>
+              </a:rPr>
+              <a:t>EfficientNet-B4 from PyTorch (torchvision.models) with ImageNet pretrained weights.</a:t>
+            </a:r>
+          </a:p>
+          <a:p>
+            <a:pPr marL="734051" lvl="1" indent="-367026" algn="l">
+              <a:lnSpc>
+                <a:spcPts val="4759"/>
+              </a:lnSpc>
+              <a:spcBef>
+                <a:spcPct val="0"/>
+              </a:spcBef>
+              <a:buFont typeface="Arial"/>
+              <a:buChar char="•"/>
+            </a:pPr>
+            <a:r>
+              <a:rPr lang="en-US" sz="3399">
+                <a:solidFill>
+                  <a:srgbClr val="000000"/>
+                </a:solidFill>
+                <a:latin typeface="Times New Roman MT"/>
+                <a:ea typeface="Times New Roman MT"/>
+                <a:cs typeface="Times New Roman MT"/>
+                <a:sym typeface="Times New Roman MT"/>
+              </a:rPr>
+              <a:t>Modified the classifier layer for number of PCB defect classes.</a:t>
+            </a:r>
+          </a:p>
+          <a:p>
+            <a:pPr algn="l">
+              <a:lnSpc>
+                <a:spcPts val="4759"/>
+              </a:lnSpc>
+              <a:spcBef>
+                <a:spcPct val="0"/>
+              </a:spcBef>
+            </a:pPr>
+            <a:r>
+              <a:rPr lang="en-US" sz="3399" b="1">
+                <a:solidFill>
+                  <a:srgbClr val="000000"/>
+                </a:solidFill>
+                <a:latin typeface="Times New Roman MT Bold"/>
+                <a:ea typeface="Times New Roman MT Bold"/>
+                <a:cs typeface="Times New Roman MT Bold"/>
+                <a:sym typeface="Times New Roman MT Bold"/>
+              </a:rPr>
+              <a:t>Dataset &amp; Preprocessing:</a:t>
+            </a:r>
+          </a:p>
+          <a:p>
+            <a:pPr marL="734051" lvl="1" indent="-367026" algn="l">
+              <a:lnSpc>
+                <a:spcPts val="4759"/>
+              </a:lnSpc>
+              <a:spcBef>
+                <a:spcPct val="0"/>
+              </a:spcBef>
+              <a:buFont typeface="Arial"/>
+              <a:buChar char="•"/>
+            </a:pPr>
+            <a:r>
+              <a:rPr lang="en-US" sz="3399">
+                <a:solidFill>
+                  <a:srgbClr val="000000"/>
+                </a:solidFill>
+                <a:latin typeface="Times New Roman MT"/>
+                <a:ea typeface="Times New Roman MT"/>
+                <a:cs typeface="Times New Roman MT"/>
+                <a:sym typeface="Times New Roman MT"/>
+              </a:rPr>
+              <a:t>Input: 128×128 cropped defect ROIs.</a:t>
+            </a:r>
+          </a:p>
+          <a:p>
+            <a:pPr marL="734051" lvl="1" indent="-367026" algn="l">
+              <a:lnSpc>
+                <a:spcPts val="4759"/>
+              </a:lnSpc>
+              <a:spcBef>
+                <a:spcPct val="0"/>
+              </a:spcBef>
+              <a:buFont typeface="Arial"/>
+              <a:buChar char="•"/>
+            </a:pPr>
+            <a:r>
+              <a:rPr lang="en-US" sz="3399">
+                <a:solidFill>
+                  <a:srgbClr val="000000"/>
+                </a:solidFill>
+                <a:latin typeface="Times New Roman MT"/>
+                <a:ea typeface="Times New Roman MT"/>
+                <a:cs typeface="Times New Roman MT"/>
+                <a:sym typeface="Times New Roman MT"/>
+              </a:rPr>
+              <a:t>Data augmentation for training</a:t>
+            </a:r>
+          </a:p>
+          <a:p>
+            <a:pPr marL="734051" lvl="1" indent="-367026" algn="l">
+              <a:lnSpc>
+                <a:spcPts val="4759"/>
+              </a:lnSpc>
+              <a:spcBef>
+                <a:spcPct val="0"/>
+              </a:spcBef>
+              <a:buFont typeface="Arial"/>
+              <a:buChar char="•"/>
+            </a:pPr>
+            <a:r>
+              <a:rPr lang="en-US" sz="3399">
+                <a:solidFill>
+                  <a:srgbClr val="000000"/>
+                </a:solidFill>
+                <a:latin typeface="Times New Roman MT"/>
+                <a:ea typeface="Times New Roman MT"/>
+                <a:cs typeface="Times New Roman MT"/>
+                <a:sym typeface="Times New Roman MT"/>
+              </a:rPr>
+              <a:t>Normalization applied to all images.</a:t>
+            </a:r>
+          </a:p>
+          <a:p>
+            <a:pPr marL="734051" lvl="1" indent="-367026" algn="l">
+              <a:lnSpc>
+                <a:spcPts val="4759"/>
+              </a:lnSpc>
+              <a:spcBef>
+                <a:spcPct val="0"/>
+              </a:spcBef>
+              <a:buFont typeface="Arial"/>
+              <a:buChar char="•"/>
+            </a:pPr>
+            <a:r>
+              <a:rPr lang="en-US" sz="3399">
+                <a:solidFill>
+                  <a:srgbClr val="000000"/>
+                </a:solidFill>
+                <a:latin typeface="Times New Roman MT"/>
+                <a:ea typeface="Times New Roman MT"/>
+                <a:cs typeface="Times New Roman MT"/>
+                <a:sym typeface="Times New Roman MT"/>
+              </a:rPr>
+              <a:t>Train-validation split: 80%-20% (stratified by defect class).</a:t>
+            </a:r>
+          </a:p>
+          <a:p>
+            <a:pPr algn="l">
+              <a:lnSpc>
+                <a:spcPts val="4759"/>
+              </a:lnSpc>
+              <a:spcBef>
+                <a:spcPct val="0"/>
+              </a:spcBef>
+            </a:pPr>
+            <a:r>
+              <a:rPr lang="en-US" sz="3399" b="1">
+                <a:solidFill>
+                  <a:srgbClr val="000000"/>
+                </a:solidFill>
+                <a:latin typeface="Times New Roman MT Bold"/>
+                <a:ea typeface="Times New Roman MT Bold"/>
+                <a:cs typeface="Times New Roman MT Bold"/>
+                <a:sym typeface="Times New Roman MT Bold"/>
+              </a:rPr>
+              <a:t>Training Details:</a:t>
+            </a:r>
+          </a:p>
+          <a:p>
+            <a:pPr marL="734051" lvl="1" indent="-367026" algn="l">
+              <a:lnSpc>
+                <a:spcPts val="4759"/>
+              </a:lnSpc>
+              <a:spcBef>
+                <a:spcPct val="0"/>
+              </a:spcBef>
+              <a:buFont typeface="Arial"/>
+              <a:buChar char="•"/>
+            </a:pPr>
+            <a:r>
+              <a:rPr lang="en-US" sz="3399">
+                <a:solidFill>
+                  <a:srgbClr val="000000"/>
+                </a:solidFill>
+                <a:latin typeface="Times New Roman MT"/>
+                <a:ea typeface="Times New Roman MT"/>
+                <a:cs typeface="Times New Roman MT"/>
+                <a:sym typeface="Times New Roman MT"/>
+              </a:rPr>
+              <a:t>Optimizer: AdamW</a:t>
+            </a:r>
+          </a:p>
+          <a:p>
+            <a:pPr marL="734051" lvl="1" indent="-367026" algn="l">
+              <a:lnSpc>
+                <a:spcPts val="4759"/>
+              </a:lnSpc>
+              <a:spcBef>
+                <a:spcPct val="0"/>
+              </a:spcBef>
+              <a:buFont typeface="Arial"/>
+              <a:buChar char="•"/>
+            </a:pPr>
+            <a:r>
+              <a:rPr lang="en-US" sz="3399">
+                <a:solidFill>
+                  <a:srgbClr val="000000"/>
+                </a:solidFill>
+                <a:latin typeface="Times New Roman MT"/>
+                <a:ea typeface="Times New Roman MT"/>
+                <a:cs typeface="Times New Roman MT"/>
+                <a:sym typeface="Times New Roman MT"/>
+              </a:rPr>
+              <a:t>Loss Function: Cross-Entropy with label smoothing</a:t>
+            </a:r>
+          </a:p>
+          <a:p>
+            <a:pPr marL="734051" lvl="1" indent="-367026" algn="l">
+              <a:lnSpc>
+                <a:spcPts val="4759"/>
+              </a:lnSpc>
+              <a:spcBef>
+                <a:spcPct val="0"/>
+              </a:spcBef>
+              <a:buFont typeface="Arial"/>
+              <a:buChar char="•"/>
+            </a:pPr>
+            <a:r>
+              <a:rPr lang="en-US" sz="3399">
+                <a:solidFill>
+                  <a:srgbClr val="000000"/>
+                </a:solidFill>
+                <a:latin typeface="Times New Roman MT"/>
+                <a:ea typeface="Times New Roman MT"/>
+                <a:cs typeface="Times New Roman MT"/>
+                <a:sym typeface="Times New Roman MT"/>
+              </a:rPr>
+              <a:t>Scheduler: Cosine Annealing LR</a:t>
+            </a:r>
+          </a:p>
+          <a:p>
+            <a:pPr marL="734051" lvl="1" indent="-367026" algn="l">
+              <a:lnSpc>
+                <a:spcPts val="4759"/>
+              </a:lnSpc>
+              <a:spcBef>
+                <a:spcPct val="0"/>
+              </a:spcBef>
+              <a:buFont typeface="Arial"/>
+              <a:buChar char="•"/>
+            </a:pPr>
+            <a:r>
+              <a:rPr lang="en-US" sz="3399">
+                <a:solidFill>
+                  <a:srgbClr val="000000"/>
+                </a:solidFill>
+                <a:latin typeface="Times New Roman MT"/>
+                <a:ea typeface="Times New Roman MT"/>
+                <a:cs typeface="Times New Roman MT"/>
+                <a:sym typeface="Times New Roman MT"/>
+              </a:rPr>
+              <a:t>Mixed Precision Training: autocast + GradScaler for speed &amp; GPU efficiency</a:t>
+            </a:r>
+          </a:p>
+          <a:p>
+            <a:pPr marL="734051" lvl="1" indent="-367026" algn="l">
+              <a:lnSpc>
+                <a:spcPts val="4759"/>
+              </a:lnSpc>
+              <a:spcBef>
+                <a:spcPct val="0"/>
+              </a:spcBef>
+              <a:buFont typeface="Arial"/>
+              <a:buChar char="•"/>
+            </a:pPr>
+            <a:r>
+              <a:rPr lang="en-US" sz="3399">
+                <a:solidFill>
+                  <a:srgbClr val="000000"/>
+                </a:solidFill>
+                <a:latin typeface="Times New Roman MT"/>
+                <a:ea typeface="Times New Roman MT"/>
+                <a:cs typeface="Times New Roman MT"/>
+                <a:sym typeface="Times New Roman MT"/>
+              </a:rPr>
+              <a:t>Early stopping: Patience = 5 epochs (to avoid overfitting)</a:t>
+            </a:r>
+          </a:p>
+          <a:p>
+            <a:pPr algn="l">
+              <a:lnSpc>
+                <a:spcPts val="4759"/>
+              </a:lnSpc>
+              <a:spcBef>
+                <a:spcPct val="0"/>
+              </a:spcBef>
+            </a:pPr>
+            <a:endParaRPr/>
+          </a:p>
+        </p:txBody>
+      </p:sp>
+    </p:spTree>
+  </p:cSld>
+  <p:clrMapOvr>
+    <a:masterClrMapping/>
+  </p:clrMapOvr>
+</p:sld>
+</file>
+
+<file path=ppt/slides/slide12.xml><?xml version="1.0" encoding="utf-8"?>
 <p:sld xmlns:a="http://schemas.openxmlformats.org/drawingml/2006/main" xmlns:r="http://schemas.openxmlformats.org/officeDocument/2006/relationships" xmlns:p="http://schemas.openxmlformats.org/presentationml/2006/main">
   <p:cSld>
     <p:bg>
@@ -4137,7 +5484,7 @@
 </p:sld>
 </file>
 
-<file path=ppt/slides/slide11.xml><?xml version="1.0" encoding="utf-8"?>
+<file path=ppt/slides/slide13.xml><?xml version="1.0" encoding="utf-8"?>
 <p:sld xmlns:a="http://schemas.openxmlformats.org/drawingml/2006/main" xmlns:r="http://schemas.openxmlformats.org/officeDocument/2006/relationships" xmlns:p="http://schemas.openxmlformats.org/presentationml/2006/main">
   <p:cSld>
     <p:bg>
@@ -4230,7 +5577,7 @@
               </a:lnSpc>
             </a:pPr>
             <a:r>
-              <a:rPr lang="en-US" sz="3709" b="1">
+              <a:rPr lang="en-US" sz="3709" b="1" dirty="0">
                 <a:solidFill>
                   <a:srgbClr val="000000"/>
                 </a:solidFill>
@@ -4251,7 +5598,7 @@
               <a:buChar char="•"/>
             </a:pPr>
             <a:r>
-              <a:rPr lang="en-US" sz="3709">
+              <a:rPr lang="en-US" sz="3709" dirty="0">
                 <a:solidFill>
                   <a:srgbClr val="000000"/>
                 </a:solidFill>
@@ -4272,7 +5619,7 @@
               <a:buChar char="•"/>
             </a:pPr>
             <a:r>
-              <a:rPr lang="en-US" sz="3709">
+              <a:rPr lang="en-US" sz="3709" dirty="0">
                 <a:solidFill>
                   <a:srgbClr val="000000"/>
                 </a:solidFill>
@@ -4293,7 +5640,7 @@
               <a:buChar char="•"/>
             </a:pPr>
             <a:r>
-              <a:rPr lang="en-US" sz="3709">
+              <a:rPr lang="en-US" sz="3709" dirty="0">
                 <a:solidFill>
                   <a:srgbClr val="000000"/>
                 </a:solidFill>
@@ -4310,11 +5657,11 @@
               <a:lnSpc>
                 <a:spcPts val="5192"/>
               </a:lnSpc>
-              <a:buFont typeface="Arial"/>
-              <a:buChar char="⚬"/>
-            </a:pPr>
-            <a:r>
-              <a:rPr lang="en-US" sz="3709">
+              <a:buFont typeface="Wingdings" pitchFamily="2" charset="2"/>
+              <a:buChar char="v"/>
+            </a:pPr>
+            <a:r>
+              <a:rPr lang="en-US" sz="3709" dirty="0">
                 <a:solidFill>
                   <a:srgbClr val="000000"/>
                 </a:solidFill>
@@ -4331,11 +5678,11 @@
               <a:lnSpc>
                 <a:spcPts val="5192"/>
               </a:lnSpc>
-              <a:buFont typeface="Arial"/>
-              <a:buChar char="⚬"/>
-            </a:pPr>
-            <a:r>
-              <a:rPr lang="en-US" sz="3709">
+              <a:buFont typeface="Wingdings" pitchFamily="2" charset="2"/>
+              <a:buChar char="v"/>
+            </a:pPr>
+            <a:r>
+              <a:rPr lang="en-US" sz="3709" dirty="0">
                 <a:solidFill>
                   <a:srgbClr val="000000"/>
                 </a:solidFill>
@@ -4356,7 +5703,7 @@
               <a:buChar char="•"/>
             </a:pPr>
             <a:r>
-              <a:rPr lang="en-US" sz="3709">
+              <a:rPr lang="en-US" sz="3709" dirty="0">
                 <a:solidFill>
                   <a:srgbClr val="000000"/>
                 </a:solidFill>
@@ -4377,7 +5724,7 @@
               <a:buChar char="•"/>
             </a:pPr>
             <a:r>
-              <a:rPr lang="en-US" sz="3709">
+              <a:rPr lang="en-US" sz="3709" dirty="0">
                 <a:solidFill>
                   <a:srgbClr val="000000"/>
                 </a:solidFill>
@@ -4675,7 +6022,7 @@
 </p:sld>
 </file>
 
-<file path=ppt/slides/slide12.xml><?xml version="1.0" encoding="utf-8"?>
+<file path=ppt/slides/slide14.xml><?xml version="1.0" encoding="utf-8"?>
 <p:sld xmlns:a="http://schemas.openxmlformats.org/drawingml/2006/main" xmlns:r="http://schemas.openxmlformats.org/officeDocument/2006/relationships" xmlns:p="http://schemas.openxmlformats.org/presentationml/2006/main">
   <p:cSld>
     <p:bg>
@@ -5229,7 +6576,7 @@
 </p:sld>
 </file>
 
-<file path=ppt/slides/slide13.xml><?xml version="1.0" encoding="utf-8"?>
+<file path=ppt/slides/slide15.xml><?xml version="1.0" encoding="utf-8"?>
 <p:sld xmlns:a="http://schemas.openxmlformats.org/drawingml/2006/main" xmlns:r="http://schemas.openxmlformats.org/officeDocument/2006/relationships" xmlns:p="http://schemas.openxmlformats.org/presentationml/2006/main">
   <p:cSld>
     <p:bg>
@@ -5827,7 +7174,7 @@
 </p:sld>
 </file>
 
-<file path=ppt/slides/slide14.xml><?xml version="1.0" encoding="utf-8"?>
+<file path=ppt/slides/slide16.xml><?xml version="1.0" encoding="utf-8"?>
 <p:sld xmlns:a="http://schemas.openxmlformats.org/drawingml/2006/main" xmlns:r="http://schemas.openxmlformats.org/officeDocument/2006/relationships" xmlns:p="http://schemas.openxmlformats.org/presentationml/2006/main">
   <p:cSld>
     <p:bg>
@@ -6311,213 +7658,7 @@
 </p:sld>
 </file>
 
-<file path=ppt/slides/slide15.xml><?xml version="1.0" encoding="utf-8"?>
-<p:sld xmlns:a="http://schemas.openxmlformats.org/drawingml/2006/main" xmlns:r="http://schemas.openxmlformats.org/officeDocument/2006/relationships" xmlns:p="http://schemas.openxmlformats.org/presentationml/2006/main">
-  <p:cSld>
-    <p:bg>
-      <p:bgPr>
-        <a:solidFill>
-          <a:srgbClr val="F6F3EB"/>
-        </a:solidFill>
-        <a:effectLst/>
-      </p:bgPr>
-    </p:bg>
-    <p:spTree>
-      <p:nvGrpSpPr>
-        <p:cNvPr id="1" name=""/>
-        <p:cNvGrpSpPr/>
-        <p:nvPr/>
-      </p:nvGrpSpPr>
-      <p:grpSpPr>
-        <a:xfrm>
-          <a:off x="0" y="0"/>
-          <a:ext cx="0" cy="0"/>
-          <a:chOff x="0" y="0"/>
-          <a:chExt cx="0" cy="0"/>
-        </a:xfrm>
-      </p:grpSpPr>
-      <p:pic>
-        <p:nvPicPr>
-          <p:cNvPr id="2" name="Recording 2025-10-07 153308.mp4">
-            <a:hlinkClick r:id="" action="ppaction://media"/>
-          </p:cNvPr>
-          <p:cNvPicPr>
-            <a:picLocks noRot="1" noChangeAspect="1"/>
-          </p:cNvPicPr>
-          <p:nvPr>
-            <a:videoFile r:link="rId1"/>
-          </p:nvPr>
-        </p:nvPicPr>
-        <p:blipFill>
-          <a:blip r:embed="rId3"/>
-          <a:stretch>
-            <a:fillRect/>
-          </a:stretch>
-        </p:blipFill>
-        <p:spPr>
-          <a:xfrm>
-            <a:off x="0" y="0"/>
-            <a:ext cx="18288000" cy="10287000"/>
-          </a:xfrm>
-          <a:prstGeom prst="rect">
-            <a:avLst/>
-          </a:prstGeom>
-        </p:spPr>
-      </p:pic>
-    </p:spTree>
-  </p:cSld>
-  <p:clrMapOvr>
-    <a:masterClrMapping/>
-  </p:clrMapOvr>
-  <p:timing>
-    <p:tnLst>
-      <p:par>
-        <p:cTn id="1" dur="indefinite" restart="never" nodeType="tmRoot">
-          <p:childTnLst>
-            <p:seq concurrent="1" nextAc="seek">
-              <p:cTn id="2" dur="indefinite" nodeType="mainSeq">
-                <p:childTnLst>
-                  <p:par>
-                    <p:cTn id="3" fill="hold">
-                      <p:stCondLst>
-                        <p:cond delay="indefinite"/>
-                        <p:cond evt="onBegin" delay="0">
-                          <p:tn val="2"/>
-                        </p:cond>
-                      </p:stCondLst>
-                      <p:childTnLst>
-                        <p:par>
-                          <p:cTn id="4" fill="hold">
-                            <p:stCondLst>
-                              <p:cond delay="0"/>
-                            </p:stCondLst>
-                            <p:childTnLst>
-                              <p:par>
-                                <p:cTn id="5" presetID="1" presetClass="mediacall" presetSubtype="0" fill="hold" nodeType="afterEffect">
-                                  <p:stCondLst>
-                                    <p:cond delay="0"/>
-                                  </p:stCondLst>
-                                  <p:childTnLst>
-                                    <p:cmd type="call" cmd="playFrom(0.0)">
-                                      <p:cBhvr>
-                                        <p:cTn id="6" dur="1" fill="hold"/>
-                                        <p:tgtEl>
-                                          <p:spTgt spid="2"/>
-                                        </p:tgtEl>
-                                      </p:cBhvr>
-                                    </p:cmd>
-                                  </p:childTnLst>
-                                </p:cTn>
-                              </p:par>
-                            </p:childTnLst>
-                          </p:cTn>
-                        </p:par>
-                      </p:childTnLst>
-                    </p:cTn>
-                  </p:par>
-                </p:childTnLst>
-              </p:cTn>
-              <p:prevCondLst>
-                <p:cond evt="onPrev" delay="0">
-                  <p:tgtEl>
-                    <p:sldTgt/>
-                  </p:tgtEl>
-                </p:cond>
-              </p:prevCondLst>
-              <p:nextCondLst>
-                <p:cond evt="onNext" delay="0">
-                  <p:tgtEl>
-                    <p:sldTgt/>
-                  </p:tgtEl>
-                </p:cond>
-              </p:nextCondLst>
-            </p:seq>
-            <p:video>
-              <p:cMediaNode numSld="999">
-                <p:cTn id="7" fill="hold" display="0">
-                  <p:stCondLst>
-                    <p:cond delay="indefinite"/>
-                  </p:stCondLst>
-                  <p:endCondLst>
-                    <p:cond evt="onPrev" delay="0">
-                      <p:tgtEl>
-                        <p:sldTgt/>
-                      </p:tgtEl>
-                    </p:cond>
-                  </p:endCondLst>
-                </p:cTn>
-                <p:tgtEl>
-                  <p:spTgt spid="2"/>
-                </p:tgtEl>
-              </p:cMediaNode>
-            </p:video>
-            <p:seq concurrent="1" nextAc="seek">
-              <p:cTn id="8" restart="whenNotActive" fill="hold" evtFilter="cancelBubble" nodeType="interactiveSeq">
-                <p:stCondLst>
-                  <p:cond evt="onClick" delay="0">
-                    <p:tgtEl>
-                      <p:spTgt spid="2"/>
-                    </p:tgtEl>
-                  </p:cond>
-                </p:stCondLst>
-                <p:endSync evt="end" delay="0">
-                  <p:rtn val="all"/>
-                </p:endSync>
-                <p:childTnLst>
-                  <p:par>
-                    <p:cTn id="9" fill="hold">
-                      <p:stCondLst>
-                        <p:cond delay="0"/>
-                      </p:stCondLst>
-                      <p:childTnLst>
-                        <p:par>
-                          <p:cTn id="10" fill="hold">
-                            <p:stCondLst>
-                              <p:cond delay="0"/>
-                            </p:stCondLst>
-                            <p:childTnLst>
-                              <p:par>
-                                <p:cTn id="11" presetID="2" presetClass="mediacall" presetSubtype="0" fill="hold" nodeType="clickEffect">
-                                  <p:stCondLst>
-                                    <p:cond delay="0"/>
-                                  </p:stCondLst>
-                                  <p:childTnLst>
-                                    <p:cmd type="call" cmd="togglePause">
-                                      <p:cBhvr>
-                                        <p:cTn id="12" dur="1" fill="hold"/>
-                                        <p:tgtEl>
-                                          <p:spTgt spid="2"/>
-                                        </p:tgtEl>
-                                      </p:cBhvr>
-                                    </p:cmd>
-                                  </p:childTnLst>
-                                </p:cTn>
-                              </p:par>
-                            </p:childTnLst>
-                          </p:cTn>
-                        </p:par>
-                      </p:childTnLst>
-                    </p:cTn>
-                  </p:par>
-                </p:childTnLst>
-              </p:cTn>
-              <p:nextCondLst>
-                <p:cond evt="onClick" delay="0">
-                  <p:tgtEl>
-                    <p:spTgt spid="2"/>
-                  </p:tgtEl>
-                </p:cond>
-              </p:nextCondLst>
-            </p:seq>
-          </p:childTnLst>
-        </p:cTn>
-      </p:par>
-    </p:tnLst>
-  </p:timing>
-</p:sld>
-</file>
-
-<file path=ppt/slides/slide16.xml><?xml version="1.0" encoding="utf-8"?>
+<file path=ppt/slides/slide17.xml><?xml version="1.0" encoding="utf-8"?>
 <p:sld xmlns:a="http://schemas.openxmlformats.org/drawingml/2006/main" xmlns:r="http://schemas.openxmlformats.org/officeDocument/2006/relationships" xmlns:p="http://schemas.openxmlformats.org/presentationml/2006/main">
   <p:cSld>
     <p:bg>
@@ -6984,6 +8125,487 @@
           <a:chExt cx="0" cy="0"/>
         </a:xfrm>
       </p:grpSpPr>
+      <p:pic>
+        <p:nvPicPr>
+          <p:cNvPr id="2" name="Recording 2025-10-07 153308.mp4">
+            <a:hlinkClick r:id="" action="ppaction://media"/>
+          </p:cNvPr>
+          <p:cNvPicPr>
+            <a:picLocks noRot="1" noChangeAspect="1"/>
+          </p:cNvPicPr>
+          <p:nvPr>
+            <a:videoFile r:link="rId1"/>
+          </p:nvPr>
+        </p:nvPicPr>
+        <p:blipFill>
+          <a:blip r:embed="rId3"/>
+          <a:stretch>
+            <a:fillRect/>
+          </a:stretch>
+        </p:blipFill>
+        <p:spPr>
+          <a:xfrm>
+            <a:off x="2438400" y="1714500"/>
+            <a:ext cx="14173200" cy="7686676"/>
+          </a:xfrm>
+          <a:prstGeom prst="rect">
+            <a:avLst/>
+          </a:prstGeom>
+        </p:spPr>
+      </p:pic>
+      <p:sp>
+        <p:nvSpPr>
+          <p:cNvPr id="4" name="TextBox 3"/>
+          <p:cNvSpPr txBox="1"/>
+          <p:nvPr/>
+        </p:nvSpPr>
+        <p:spPr>
+          <a:xfrm>
+            <a:off x="914400" y="419100"/>
+            <a:ext cx="14706600" cy="769441"/>
+          </a:xfrm>
+          <a:prstGeom prst="rect">
+            <a:avLst/>
+          </a:prstGeom>
+          <a:noFill/>
+        </p:spPr>
+        <p:txBody>
+          <a:bodyPr wrap="square" rtlCol="0">
+            <a:spAutoFit/>
+          </a:bodyPr>
+          <a:lstStyle/>
+          <a:p>
+            <a:r>
+              <a:rPr lang="en-US" sz="4400" b="1" dirty="0" smtClean="0">
+                <a:latin typeface="Times New Roman" pitchFamily="18" charset="0"/>
+                <a:cs typeface="Times New Roman" pitchFamily="18" charset="0"/>
+              </a:rPr>
+              <a:t>DEMO (BOTH PCB_USED AND DEFECTED IMAGE)</a:t>
+            </a:r>
+            <a:endParaRPr lang="en-US" sz="4400" b="1" dirty="0">
+              <a:latin typeface="Times New Roman" pitchFamily="18" charset="0"/>
+              <a:cs typeface="Times New Roman" pitchFamily="18" charset="0"/>
+            </a:endParaRPr>
+          </a:p>
+        </p:txBody>
+      </p:sp>
+    </p:spTree>
+  </p:cSld>
+  <p:clrMapOvr>
+    <a:masterClrMapping/>
+  </p:clrMapOvr>
+  <p:timing>
+    <p:tnLst>
+      <p:par>
+        <p:cTn id="1" dur="indefinite" restart="never" nodeType="tmRoot">
+          <p:childTnLst>
+            <p:seq concurrent="1" nextAc="seek">
+              <p:cTn id="2" dur="indefinite" nodeType="mainSeq">
+                <p:childTnLst>
+                  <p:par>
+                    <p:cTn id="3" fill="hold">
+                      <p:stCondLst>
+                        <p:cond delay="indefinite"/>
+                        <p:cond evt="onBegin" delay="0">
+                          <p:tn val="2"/>
+                        </p:cond>
+                      </p:stCondLst>
+                      <p:childTnLst>
+                        <p:par>
+                          <p:cTn id="4" fill="hold">
+                            <p:stCondLst>
+                              <p:cond delay="0"/>
+                            </p:stCondLst>
+                            <p:childTnLst>
+                              <p:par>
+                                <p:cTn id="5" presetID="1" presetClass="mediacall" presetSubtype="0" fill="hold" nodeType="afterEffect">
+                                  <p:stCondLst>
+                                    <p:cond delay="0"/>
+                                  </p:stCondLst>
+                                  <p:childTnLst>
+                                    <p:cmd type="call" cmd="playFrom(0.0)">
+                                      <p:cBhvr>
+                                        <p:cTn id="6" dur="1" fill="hold"/>
+                                        <p:tgtEl>
+                                          <p:spTgt spid="2"/>
+                                        </p:tgtEl>
+                                      </p:cBhvr>
+                                    </p:cmd>
+                                  </p:childTnLst>
+                                </p:cTn>
+                              </p:par>
+                            </p:childTnLst>
+                          </p:cTn>
+                        </p:par>
+                      </p:childTnLst>
+                    </p:cTn>
+                  </p:par>
+                </p:childTnLst>
+              </p:cTn>
+              <p:prevCondLst>
+                <p:cond evt="onPrev" delay="0">
+                  <p:tgtEl>
+                    <p:sldTgt/>
+                  </p:tgtEl>
+                </p:cond>
+              </p:prevCondLst>
+              <p:nextCondLst>
+                <p:cond evt="onNext" delay="0">
+                  <p:tgtEl>
+                    <p:sldTgt/>
+                  </p:tgtEl>
+                </p:cond>
+              </p:nextCondLst>
+            </p:seq>
+            <p:video>
+              <p:cMediaNode numSld="999">
+                <p:cTn id="7" fill="hold" display="0">
+                  <p:stCondLst>
+                    <p:cond delay="indefinite"/>
+                  </p:stCondLst>
+                  <p:endCondLst>
+                    <p:cond evt="onPrev" delay="0">
+                      <p:tgtEl>
+                        <p:sldTgt/>
+                      </p:tgtEl>
+                    </p:cond>
+                  </p:endCondLst>
+                </p:cTn>
+                <p:tgtEl>
+                  <p:spTgt spid="2"/>
+                </p:tgtEl>
+              </p:cMediaNode>
+            </p:video>
+            <p:seq concurrent="1" nextAc="seek">
+              <p:cTn id="8" restart="whenNotActive" fill="hold" evtFilter="cancelBubble" nodeType="interactiveSeq">
+                <p:stCondLst>
+                  <p:cond evt="onClick" delay="0">
+                    <p:tgtEl>
+                      <p:spTgt spid="2"/>
+                    </p:tgtEl>
+                  </p:cond>
+                </p:stCondLst>
+                <p:endSync evt="end" delay="0">
+                  <p:rtn val="all"/>
+                </p:endSync>
+                <p:childTnLst>
+                  <p:par>
+                    <p:cTn id="9" fill="hold">
+                      <p:stCondLst>
+                        <p:cond delay="0"/>
+                      </p:stCondLst>
+                      <p:childTnLst>
+                        <p:par>
+                          <p:cTn id="10" fill="hold">
+                            <p:stCondLst>
+                              <p:cond delay="0"/>
+                            </p:stCondLst>
+                            <p:childTnLst>
+                              <p:par>
+                                <p:cTn id="11" presetID="2" presetClass="mediacall" presetSubtype="0" fill="hold" nodeType="clickEffect">
+                                  <p:stCondLst>
+                                    <p:cond delay="0"/>
+                                  </p:stCondLst>
+                                  <p:childTnLst>
+                                    <p:cmd type="call" cmd="togglePause">
+                                      <p:cBhvr>
+                                        <p:cTn id="12" dur="1" fill="hold"/>
+                                        <p:tgtEl>
+                                          <p:spTgt spid="2"/>
+                                        </p:tgtEl>
+                                      </p:cBhvr>
+                                    </p:cmd>
+                                  </p:childTnLst>
+                                </p:cTn>
+                              </p:par>
+                            </p:childTnLst>
+                          </p:cTn>
+                        </p:par>
+                      </p:childTnLst>
+                    </p:cTn>
+                  </p:par>
+                </p:childTnLst>
+              </p:cTn>
+              <p:nextCondLst>
+                <p:cond evt="onClick" delay="0">
+                  <p:tgtEl>
+                    <p:spTgt spid="2"/>
+                  </p:tgtEl>
+                </p:cond>
+              </p:nextCondLst>
+            </p:seq>
+          </p:childTnLst>
+        </p:cTn>
+      </p:par>
+    </p:tnLst>
+  </p:timing>
+</p:sld>
+</file>
+
+<file path=ppt/slides/slide3.xml><?xml version="1.0" encoding="utf-8"?>
+<p:sld xmlns:a="http://schemas.openxmlformats.org/drawingml/2006/main" xmlns:r="http://schemas.openxmlformats.org/officeDocument/2006/relationships" xmlns:p="http://schemas.openxmlformats.org/presentationml/2006/main">
+  <p:cSld>
+    <p:spTree>
+      <p:nvGrpSpPr>
+        <p:cNvPr id="1" name=""/>
+        <p:cNvGrpSpPr/>
+        <p:nvPr/>
+      </p:nvGrpSpPr>
+      <p:grpSpPr>
+        <a:xfrm>
+          <a:off x="0" y="0"/>
+          <a:ext cx="0" cy="0"/>
+          <a:chOff x="0" y="0"/>
+          <a:chExt cx="0" cy="0"/>
+        </a:xfrm>
+      </p:grpSpPr>
+      <p:sp>
+        <p:nvSpPr>
+          <p:cNvPr id="4" name="TextBox 3"/>
+          <p:cNvSpPr txBox="1"/>
+          <p:nvPr/>
+        </p:nvSpPr>
+        <p:spPr>
+          <a:xfrm>
+            <a:off x="914400" y="419100"/>
+            <a:ext cx="14706600" cy="769441"/>
+          </a:xfrm>
+          <a:prstGeom prst="rect">
+            <a:avLst/>
+          </a:prstGeom>
+          <a:noFill/>
+        </p:spPr>
+        <p:txBody>
+          <a:bodyPr wrap="square" rtlCol="0">
+            <a:spAutoFit/>
+          </a:bodyPr>
+          <a:lstStyle/>
+          <a:p>
+            <a:r>
+              <a:rPr lang="en-US" sz="4400" b="1" dirty="0" smtClean="0">
+                <a:latin typeface="Times New Roman" pitchFamily="18" charset="0"/>
+                <a:cs typeface="Times New Roman" pitchFamily="18" charset="0"/>
+              </a:rPr>
+              <a:t>DEMO (ONLY DEFECTED IMAGE)</a:t>
+            </a:r>
+            <a:endParaRPr lang="en-US" sz="4400" b="1" dirty="0">
+              <a:latin typeface="Times New Roman" pitchFamily="18" charset="0"/>
+              <a:cs typeface="Times New Roman" pitchFamily="18" charset="0"/>
+            </a:endParaRPr>
+          </a:p>
+        </p:txBody>
+      </p:sp>
+      <p:pic>
+        <p:nvPicPr>
+          <p:cNvPr id="5" name="Recording 2025-10-10 135819.mp4">
+            <a:hlinkClick r:id="" action="ppaction://media"/>
+          </p:cNvPr>
+          <p:cNvPicPr>
+            <a:picLocks noRot="1" noChangeAspect="1"/>
+          </p:cNvPicPr>
+          <p:nvPr>
+            <a:videoFile r:link="rId1"/>
+          </p:nvPr>
+        </p:nvPicPr>
+        <p:blipFill>
+          <a:blip r:embed="rId3"/>
+          <a:stretch>
+            <a:fillRect/>
+          </a:stretch>
+        </p:blipFill>
+        <p:spPr>
+          <a:xfrm>
+            <a:off x="2667000" y="1866900"/>
+            <a:ext cx="13335000" cy="7467600"/>
+          </a:xfrm>
+          <a:prstGeom prst="rect">
+            <a:avLst/>
+          </a:prstGeom>
+        </p:spPr>
+      </p:pic>
+    </p:spTree>
+  </p:cSld>
+  <p:clrMapOvr>
+    <a:masterClrMapping/>
+  </p:clrMapOvr>
+  <p:timing>
+    <p:tnLst>
+      <p:par>
+        <p:cTn id="1" dur="indefinite" restart="never" nodeType="tmRoot">
+          <p:childTnLst>
+            <p:seq concurrent="1" nextAc="seek">
+              <p:cTn id="2" dur="indefinite" nodeType="mainSeq">
+                <p:childTnLst>
+                  <p:par>
+                    <p:cTn id="3" fill="hold">
+                      <p:stCondLst>
+                        <p:cond delay="indefinite"/>
+                        <p:cond evt="onBegin" delay="0">
+                          <p:tn val="2"/>
+                        </p:cond>
+                      </p:stCondLst>
+                      <p:childTnLst>
+                        <p:par>
+                          <p:cTn id="4" fill="hold">
+                            <p:stCondLst>
+                              <p:cond delay="0"/>
+                            </p:stCondLst>
+                            <p:childTnLst>
+                              <p:par>
+                                <p:cTn id="5" presetID="1" presetClass="mediacall" presetSubtype="0" fill="hold" nodeType="afterEffect">
+                                  <p:stCondLst>
+                                    <p:cond delay="0"/>
+                                  </p:stCondLst>
+                                  <p:childTnLst>
+                                    <p:cmd type="call" cmd="playFrom(0.0)">
+                                      <p:cBhvr>
+                                        <p:cTn id="6" dur="1" fill="hold"/>
+                                        <p:tgtEl>
+                                          <p:spTgt spid="5"/>
+                                        </p:tgtEl>
+                                      </p:cBhvr>
+                                    </p:cmd>
+                                  </p:childTnLst>
+                                </p:cTn>
+                              </p:par>
+                            </p:childTnLst>
+                          </p:cTn>
+                        </p:par>
+                      </p:childTnLst>
+                    </p:cTn>
+                  </p:par>
+                </p:childTnLst>
+              </p:cTn>
+              <p:prevCondLst>
+                <p:cond evt="onPrev" delay="0">
+                  <p:tgtEl>
+                    <p:sldTgt/>
+                  </p:tgtEl>
+                </p:cond>
+              </p:prevCondLst>
+              <p:nextCondLst>
+                <p:cond evt="onNext" delay="0">
+                  <p:tgtEl>
+                    <p:sldTgt/>
+                  </p:tgtEl>
+                </p:cond>
+              </p:nextCondLst>
+            </p:seq>
+            <p:video>
+              <p:cMediaNode>
+                <p:cTn id="7" fill="hold" display="0">
+                  <p:stCondLst>
+                    <p:cond delay="indefinite"/>
+                  </p:stCondLst>
+                  <p:endCondLst>
+                    <p:cond evt="onNext" delay="0">
+                      <p:tgtEl>
+                        <p:sldTgt/>
+                      </p:tgtEl>
+                    </p:cond>
+                    <p:cond evt="onPrev" delay="0">
+                      <p:tgtEl>
+                        <p:sldTgt/>
+                      </p:tgtEl>
+                    </p:cond>
+                  </p:endCondLst>
+                </p:cTn>
+                <p:tgtEl>
+                  <p:spTgt spid="5"/>
+                </p:tgtEl>
+              </p:cMediaNode>
+            </p:video>
+            <p:seq concurrent="1" nextAc="seek">
+              <p:cTn id="8" restart="whenNotActive" fill="hold" evtFilter="cancelBubble" nodeType="interactiveSeq">
+                <p:stCondLst>
+                  <p:cond evt="onClick" delay="0">
+                    <p:tgtEl>
+                      <p:spTgt spid="5"/>
+                    </p:tgtEl>
+                  </p:cond>
+                </p:stCondLst>
+                <p:endSync evt="end" delay="0">
+                  <p:rtn val="all"/>
+                </p:endSync>
+                <p:childTnLst>
+                  <p:par>
+                    <p:cTn id="9" fill="hold">
+                      <p:stCondLst>
+                        <p:cond delay="0"/>
+                      </p:stCondLst>
+                      <p:childTnLst>
+                        <p:par>
+                          <p:cTn id="10" fill="hold">
+                            <p:stCondLst>
+                              <p:cond delay="0"/>
+                            </p:stCondLst>
+                            <p:childTnLst>
+                              <p:par>
+                                <p:cTn id="11" presetID="2" presetClass="mediacall" presetSubtype="0" fill="hold" nodeType="clickEffect">
+                                  <p:stCondLst>
+                                    <p:cond delay="0"/>
+                                  </p:stCondLst>
+                                  <p:childTnLst>
+                                    <p:cmd type="call" cmd="togglePause">
+                                      <p:cBhvr>
+                                        <p:cTn id="12" dur="1" fill="hold"/>
+                                        <p:tgtEl>
+                                          <p:spTgt spid="5"/>
+                                        </p:tgtEl>
+                                      </p:cBhvr>
+                                    </p:cmd>
+                                  </p:childTnLst>
+                                </p:cTn>
+                              </p:par>
+                            </p:childTnLst>
+                          </p:cTn>
+                        </p:par>
+                      </p:childTnLst>
+                    </p:cTn>
+                  </p:par>
+                </p:childTnLst>
+              </p:cTn>
+              <p:nextCondLst>
+                <p:cond evt="onClick" delay="0">
+                  <p:tgtEl>
+                    <p:spTgt spid="5"/>
+                  </p:tgtEl>
+                </p:cond>
+              </p:nextCondLst>
+            </p:seq>
+          </p:childTnLst>
+        </p:cTn>
+      </p:par>
+    </p:tnLst>
+  </p:timing>
+</p:sld>
+</file>
+
+<file path=ppt/slides/slide4.xml><?xml version="1.0" encoding="utf-8"?>
+<p:sld xmlns:a="http://schemas.openxmlformats.org/drawingml/2006/main" xmlns:r="http://schemas.openxmlformats.org/officeDocument/2006/relationships" xmlns:p="http://schemas.openxmlformats.org/presentationml/2006/main">
+  <p:cSld>
+    <p:bg>
+      <p:bgPr>
+        <a:solidFill>
+          <a:srgbClr val="F6F3EB"/>
+        </a:solidFill>
+        <a:effectLst/>
+      </p:bgPr>
+    </p:bg>
+    <p:spTree>
+      <p:nvGrpSpPr>
+        <p:cNvPr id="1" name=""/>
+        <p:cNvGrpSpPr/>
+        <p:nvPr/>
+      </p:nvGrpSpPr>
+      <p:grpSpPr>
+        <a:xfrm>
+          <a:off x="0" y="0"/>
+          <a:ext cx="0" cy="0"/>
+          <a:chOff x="0" y="0"/>
+          <a:chExt cx="0" cy="0"/>
+        </a:xfrm>
+      </p:grpSpPr>
       <p:sp>
         <p:nvSpPr>
           <p:cNvPr id="2" name="TextBox 2"/>
@@ -7391,10 +9013,17 @@
   <p:clrMapOvr>
     <a:masterClrMapping/>
   </p:clrMapOvr>
+  <p:timing>
+    <p:tnLst>
+      <p:par>
+        <p:cTn id="1" dur="indefinite" restart="never" nodeType="tmRoot"/>
+      </p:par>
+    </p:tnLst>
+  </p:timing>
 </p:sld>
 </file>
 
-<file path=ppt/slides/slide3.xml><?xml version="1.0" encoding="utf-8"?>
+<file path=ppt/slides/slide5.xml><?xml version="1.0" encoding="utf-8"?>
 <p:sld xmlns:a="http://schemas.openxmlformats.org/drawingml/2006/main" xmlns:r="http://schemas.openxmlformats.org/officeDocument/2006/relationships" xmlns:p="http://schemas.openxmlformats.org/presentationml/2006/main">
   <p:cSld>
     <p:bg>
@@ -7922,7 +9551,7 @@
 </p:sld>
 </file>
 
-<file path=ppt/slides/slide4.xml><?xml version="1.0" encoding="utf-8"?>
+<file path=ppt/slides/slide6.xml><?xml version="1.0" encoding="utf-8"?>
 <p:sld xmlns:a="http://schemas.openxmlformats.org/drawingml/2006/main" xmlns:r="http://schemas.openxmlformats.org/officeDocument/2006/relationships" xmlns:p="http://schemas.openxmlformats.org/presentationml/2006/main">
   <p:cSld>
     <p:bg>
@@ -8464,7 +10093,7 @@
 </p:sld>
 </file>
 
-<file path=ppt/slides/slide5.xml><?xml version="1.0" encoding="utf-8"?>
+<file path=ppt/slides/slide7.xml><?xml version="1.0" encoding="utf-8"?>
 <p:sld xmlns:a="http://schemas.openxmlformats.org/drawingml/2006/main" xmlns:r="http://schemas.openxmlformats.org/officeDocument/2006/relationships" xmlns:p="http://schemas.openxmlformats.org/presentationml/2006/main">
   <p:cSld>
     <p:bg>
@@ -8958,7 +10587,7 @@
 </p:sld>
 </file>
 
-<file path=ppt/slides/slide6.xml><?xml version="1.0" encoding="utf-8"?>
+<file path=ppt/slides/slide8.xml><?xml version="1.0" encoding="utf-8"?>
 <p:sld xmlns:a="http://schemas.openxmlformats.org/drawingml/2006/main" xmlns:r="http://schemas.openxmlformats.org/officeDocument/2006/relationships" xmlns:p="http://schemas.openxmlformats.org/presentationml/2006/main">
   <p:cSld>
     <p:bg>
@@ -9397,7 +11026,7 @@
 </p:sld>
 </file>
 
-<file path=ppt/slides/slide7.xml><?xml version="1.0" encoding="utf-8"?>
+<file path=ppt/slides/slide9.xml><?xml version="1.0" encoding="utf-8"?>
 <p:sld xmlns:a="http://schemas.openxmlformats.org/drawingml/2006/main" xmlns:r="http://schemas.openxmlformats.org/officeDocument/2006/relationships" xmlns:p="http://schemas.openxmlformats.org/presentationml/2006/main">
   <p:cSld>
     <p:bg>
@@ -9954,1291 +11583,6 @@
 </p:sld>
 </file>
 
-<file path=ppt/slides/slide8.xml><?xml version="1.0" encoding="utf-8"?>
-<p:sld xmlns:a="http://schemas.openxmlformats.org/drawingml/2006/main" xmlns:r="http://schemas.openxmlformats.org/officeDocument/2006/relationships" xmlns:p="http://schemas.openxmlformats.org/presentationml/2006/main">
-  <p:cSld>
-    <p:bg>
-      <p:bgPr>
-        <a:solidFill>
-          <a:srgbClr val="F6F3EB"/>
-        </a:solidFill>
-        <a:effectLst/>
-      </p:bgPr>
-    </p:bg>
-    <p:spTree>
-      <p:nvGrpSpPr>
-        <p:cNvPr id="1" name=""/>
-        <p:cNvGrpSpPr/>
-        <p:nvPr/>
-      </p:nvGrpSpPr>
-      <p:grpSpPr>
-        <a:xfrm>
-          <a:off x="0" y="0"/>
-          <a:ext cx="0" cy="0"/>
-          <a:chOff x="0" y="0"/>
-          <a:chExt cx="0" cy="0"/>
-        </a:xfrm>
-      </p:grpSpPr>
-      <p:sp>
-        <p:nvSpPr>
-          <p:cNvPr id="2" name="TextBox 2"/>
-          <p:cNvSpPr txBox="1"/>
-          <p:nvPr/>
-        </p:nvSpPr>
-        <p:spPr>
-          <a:xfrm>
-            <a:off x="866670" y="579438"/>
-            <a:ext cx="16230600" cy="1244594"/>
-          </a:xfrm>
-          <a:prstGeom prst="rect">
-            <a:avLst/>
-          </a:prstGeom>
-        </p:spPr>
-        <p:txBody>
-          <a:bodyPr lIns="0" tIns="0" rIns="0" bIns="0" rtlCol="0" anchor="t">
-            <a:spAutoFit/>
-          </a:bodyPr>
-          <a:lstStyle/>
-          <a:p>
-            <a:pPr algn="ctr">
-              <a:lnSpc>
-                <a:spcPts val="9100"/>
-              </a:lnSpc>
-            </a:pPr>
-            <a:r>
-              <a:rPr lang="en-US" sz="6500" b="1">
-                <a:solidFill>
-                  <a:srgbClr val="000000"/>
-                </a:solidFill>
-                <a:latin typeface="Times New Roman MT Bold"/>
-                <a:ea typeface="Times New Roman MT Bold"/>
-                <a:cs typeface="Times New Roman MT Bold"/>
-                <a:sym typeface="Times New Roman MT Bold"/>
-              </a:rPr>
-              <a:t>IMAGE PROCESSING</a:t>
-            </a:r>
-          </a:p>
-        </p:txBody>
-      </p:sp>
-      <p:sp>
-        <p:nvSpPr>
-          <p:cNvPr id="3" name="TextBox 3"/>
-          <p:cNvSpPr txBox="1"/>
-          <p:nvPr/>
-        </p:nvSpPr>
-        <p:spPr>
-          <a:xfrm>
-            <a:off x="866670" y="2199782"/>
-            <a:ext cx="15524543" cy="7646034"/>
-          </a:xfrm>
-          <a:prstGeom prst="rect">
-            <a:avLst/>
-          </a:prstGeom>
-        </p:spPr>
-        <p:txBody>
-          <a:bodyPr lIns="0" tIns="0" rIns="0" bIns="0" rtlCol="0" anchor="t">
-            <a:spAutoFit/>
-          </a:bodyPr>
-          <a:lstStyle/>
-          <a:p>
-            <a:pPr algn="just">
-              <a:lnSpc>
-                <a:spcPts val="4340"/>
-              </a:lnSpc>
-            </a:pPr>
-            <a:r>
-              <a:rPr lang="en-US" sz="3100" b="1">
-                <a:solidFill>
-                  <a:srgbClr val="000000"/>
-                </a:solidFill>
-                <a:latin typeface="Times New Roman MT Bold"/>
-                <a:ea typeface="Times New Roman MT Bold"/>
-                <a:cs typeface="Times New Roman MT Bold"/>
-                <a:sym typeface="Times New Roman MT Bold"/>
-              </a:rPr>
-              <a:t>Tools Used: </a:t>
-            </a:r>
-            <a:r>
-              <a:rPr lang="en-US" sz="3100">
-                <a:solidFill>
-                  <a:srgbClr val="000000"/>
-                </a:solidFill>
-                <a:latin typeface="Times New Roman MT"/>
-                <a:ea typeface="Times New Roman MT"/>
-                <a:cs typeface="Times New Roman MT"/>
-                <a:sym typeface="Times New Roman MT"/>
-              </a:rPr>
-              <a:t>OpenCV (Python)</a:t>
-            </a:r>
-          </a:p>
-          <a:p>
-            <a:pPr algn="just">
-              <a:lnSpc>
-                <a:spcPts val="4340"/>
-              </a:lnSpc>
-            </a:pPr>
-            <a:r>
-              <a:rPr lang="en-US" sz="3100" b="1">
-                <a:solidFill>
-                  <a:srgbClr val="000000"/>
-                </a:solidFill>
-                <a:latin typeface="Times New Roman MT Bold"/>
-                <a:ea typeface="Times New Roman MT Bold"/>
-                <a:cs typeface="Times New Roman MT Bold"/>
-                <a:sym typeface="Times New Roman MT Bold"/>
-              </a:rPr>
-              <a:t>Processing Steps:</a:t>
-            </a:r>
-          </a:p>
-          <a:p>
-            <a:pPr marL="669299" lvl="1" indent="-334650" algn="just">
-              <a:lnSpc>
-                <a:spcPts val="4340"/>
-              </a:lnSpc>
-              <a:buAutoNum type="arabicPeriod"/>
-            </a:pPr>
-            <a:r>
-              <a:rPr lang="en-US" sz="3100">
-                <a:solidFill>
-                  <a:srgbClr val="000000"/>
-                </a:solidFill>
-                <a:latin typeface="Times New Roman MT"/>
-                <a:ea typeface="Times New Roman MT"/>
-                <a:cs typeface="Times New Roman MT"/>
-                <a:sym typeface="Times New Roman MT"/>
-              </a:rPr>
-              <a:t>Grayscale Conversion → Convert PCB images to grayscale for easier computation.</a:t>
-            </a:r>
-          </a:p>
-          <a:p>
-            <a:pPr marL="669299" lvl="1" indent="-334650" algn="just">
-              <a:lnSpc>
-                <a:spcPts val="4340"/>
-              </a:lnSpc>
-              <a:buAutoNum type="arabicPeriod"/>
-            </a:pPr>
-            <a:r>
-              <a:rPr lang="en-US" sz="3100">
-                <a:solidFill>
-                  <a:srgbClr val="000000"/>
-                </a:solidFill>
-                <a:latin typeface="Times New Roman MT"/>
-                <a:ea typeface="Times New Roman MT"/>
-                <a:cs typeface="Times New Roman MT"/>
-                <a:sym typeface="Times New Roman MT"/>
-              </a:rPr>
-              <a:t>Image Subtraction → Subtract template PCB from test PCB to highlight differences (defects).</a:t>
-            </a:r>
-          </a:p>
-          <a:p>
-            <a:pPr marL="669299" lvl="1" indent="-334650" algn="just">
-              <a:lnSpc>
-                <a:spcPts val="4340"/>
-              </a:lnSpc>
-              <a:buAutoNum type="arabicPeriod"/>
-            </a:pPr>
-            <a:r>
-              <a:rPr lang="en-US" sz="3100">
-                <a:solidFill>
-                  <a:srgbClr val="000000"/>
-                </a:solidFill>
-                <a:latin typeface="Times New Roman MT"/>
-                <a:ea typeface="Times New Roman MT"/>
-                <a:cs typeface="Times New Roman MT"/>
-                <a:sym typeface="Times New Roman MT"/>
-              </a:rPr>
-              <a:t>Contour Detection → Identify boundaries of defects and draw bounding boxes.</a:t>
-            </a:r>
-          </a:p>
-          <a:p>
-            <a:pPr marL="669299" lvl="1" indent="-334650" algn="just">
-              <a:lnSpc>
-                <a:spcPts val="4340"/>
-              </a:lnSpc>
-              <a:buAutoNum type="arabicPeriod"/>
-            </a:pPr>
-            <a:r>
-              <a:rPr lang="en-US" sz="3100">
-                <a:solidFill>
-                  <a:srgbClr val="000000"/>
-                </a:solidFill>
-                <a:latin typeface="Times New Roman MT"/>
-                <a:ea typeface="Times New Roman MT"/>
-                <a:cs typeface="Times New Roman MT"/>
-                <a:sym typeface="Times New Roman MT"/>
-              </a:rPr>
-              <a:t>ROI Cropping → Extract defect regions as separate images ready for CNN training.</a:t>
-            </a:r>
-          </a:p>
-          <a:p>
-            <a:pPr algn="just">
-              <a:lnSpc>
-                <a:spcPts val="4340"/>
-              </a:lnSpc>
-            </a:pPr>
-            <a:r>
-              <a:rPr lang="en-US" sz="3100" b="1">
-                <a:solidFill>
-                  <a:srgbClr val="000000"/>
-                </a:solidFill>
-                <a:latin typeface="Times New Roman MT Bold"/>
-                <a:ea typeface="Times New Roman MT Bold"/>
-                <a:cs typeface="Times New Roman MT Bold"/>
-                <a:sym typeface="Times New Roman MT Bold"/>
-              </a:rPr>
-              <a:t>Result:</a:t>
-            </a:r>
-          </a:p>
-          <a:p>
-            <a:pPr marL="669299" lvl="1" indent="-334650" algn="just">
-              <a:lnSpc>
-                <a:spcPts val="4340"/>
-              </a:lnSpc>
-              <a:buFont typeface="Arial"/>
-              <a:buChar char="•"/>
-            </a:pPr>
-            <a:r>
-              <a:rPr lang="en-US" sz="3100">
-                <a:solidFill>
-                  <a:srgbClr val="000000"/>
-                </a:solidFill>
-                <a:latin typeface="Times New Roman MT"/>
-                <a:ea typeface="Times New Roman MT"/>
-                <a:cs typeface="Times New Roman MT"/>
-                <a:sym typeface="Times New Roman MT"/>
-              </a:rPr>
-              <a:t>Each defect region is isolated and ready for classification.</a:t>
-            </a:r>
-          </a:p>
-          <a:p>
-            <a:pPr marL="669299" lvl="1" indent="-334650" algn="just">
-              <a:lnSpc>
-                <a:spcPts val="4340"/>
-              </a:lnSpc>
-              <a:buFont typeface="Arial"/>
-              <a:buChar char="•"/>
-            </a:pPr>
-            <a:r>
-              <a:rPr lang="en-US" sz="3100">
-                <a:solidFill>
-                  <a:srgbClr val="000000"/>
-                </a:solidFill>
-                <a:latin typeface="Times New Roman MT"/>
-                <a:ea typeface="Times New Roman MT"/>
-                <a:cs typeface="Times New Roman MT"/>
-                <a:sym typeface="Times New Roman MT"/>
-              </a:rPr>
-              <a:t>Visuals can include:</a:t>
-            </a:r>
-          </a:p>
-          <a:p>
-            <a:pPr marL="1338598" lvl="2" indent="-446199" algn="just">
-              <a:lnSpc>
-                <a:spcPts val="4340"/>
-              </a:lnSpc>
-              <a:buAutoNum type="alphaLcPeriod"/>
-            </a:pPr>
-            <a:r>
-              <a:rPr lang="en-US" sz="3100">
-                <a:solidFill>
-                  <a:srgbClr val="000000"/>
-                </a:solidFill>
-                <a:latin typeface="Times New Roman MT"/>
-                <a:ea typeface="Times New Roman MT"/>
-                <a:cs typeface="Times New Roman MT"/>
-                <a:sym typeface="Times New Roman MT"/>
-              </a:rPr>
-              <a:t>Original PCB</a:t>
-            </a:r>
-          </a:p>
-          <a:p>
-            <a:pPr marL="1338598" lvl="2" indent="-446199" algn="just">
-              <a:lnSpc>
-                <a:spcPts val="4340"/>
-              </a:lnSpc>
-              <a:buAutoNum type="alphaLcPeriod"/>
-            </a:pPr>
-            <a:r>
-              <a:rPr lang="en-US" sz="3100">
-                <a:solidFill>
-                  <a:srgbClr val="000000"/>
-                </a:solidFill>
-                <a:latin typeface="Times New Roman MT"/>
-                <a:ea typeface="Times New Roman MT"/>
-                <a:cs typeface="Times New Roman MT"/>
-                <a:sym typeface="Times New Roman MT"/>
-              </a:rPr>
-              <a:t>Subtracted image showing defect areas</a:t>
-            </a:r>
-          </a:p>
-          <a:p>
-            <a:pPr marL="1338598" lvl="2" indent="-446199" algn="just">
-              <a:lnSpc>
-                <a:spcPts val="4340"/>
-              </a:lnSpc>
-              <a:buAutoNum type="alphaLcPeriod"/>
-            </a:pPr>
-            <a:r>
-              <a:rPr lang="en-US" sz="3100">
-                <a:solidFill>
-                  <a:srgbClr val="000000"/>
-                </a:solidFill>
-                <a:latin typeface="Times New Roman MT"/>
-                <a:ea typeface="Times New Roman MT"/>
-                <a:cs typeface="Times New Roman MT"/>
-                <a:sym typeface="Times New Roman MT"/>
-              </a:rPr>
-              <a:t>Final annotated image with bounding boxes </a:t>
-            </a:r>
-          </a:p>
-          <a:p>
-            <a:pPr marL="1338598" lvl="2" indent="-446199" algn="just">
-              <a:lnSpc>
-                <a:spcPts val="4340"/>
-              </a:lnSpc>
-              <a:buAutoNum type="alphaLcPeriod"/>
-            </a:pPr>
-            <a:r>
-              <a:rPr lang="en-US" sz="3100">
-                <a:solidFill>
-                  <a:srgbClr val="000000"/>
-                </a:solidFill>
-                <a:latin typeface="Times New Roman MT"/>
-                <a:ea typeface="Times New Roman MT"/>
-                <a:cs typeface="Times New Roman MT"/>
-                <a:sym typeface="Times New Roman MT"/>
-              </a:rPr>
-              <a:t>The download option of the annotated image  to download.</a:t>
-            </a:r>
-          </a:p>
-        </p:txBody>
-      </p:sp>
-      <p:sp>
-        <p:nvSpPr>
-          <p:cNvPr id="4" name="Freeform 4"/>
-          <p:cNvSpPr/>
-          <p:nvPr/>
-        </p:nvSpPr>
-        <p:spPr>
-          <a:xfrm>
-            <a:off x="13764167" y="5827621"/>
-            <a:ext cx="7315200" cy="2477783"/>
-          </a:xfrm>
-          <a:custGeom>
-            <a:avLst/>
-            <a:gdLst/>
-            <a:ahLst/>
-            <a:cxnLst/>
-            <a:rect l="l" t="t" r="r" b="b"/>
-            <a:pathLst>
-              <a:path w="7315200" h="2477783">
-                <a:moveTo>
-                  <a:pt x="0" y="0"/>
-                </a:moveTo>
-                <a:lnTo>
-                  <a:pt x="7315200" y="0"/>
-                </a:lnTo>
-                <a:lnTo>
-                  <a:pt x="7315200" y="2477784"/>
-                </a:lnTo>
-                <a:lnTo>
-                  <a:pt x="0" y="2477784"/>
-                </a:lnTo>
-                <a:lnTo>
-                  <a:pt x="0" y="0"/>
-                </a:lnTo>
-                <a:close/>
-              </a:path>
-            </a:pathLst>
-          </a:custGeom>
-          <a:blipFill>
-            <a:blip r:embed="rId2">
-              <a:extLst>
-                <a:ext uri="{96DAC541-7B7A-43D3-8B79-37D633B846F1}">
-                  <asvg:svgBlip xmlns="" xmlns:asvg="http://schemas.microsoft.com/office/drawing/2016/SVG/main" r:embed="rId3"/>
-                </a:ext>
-              </a:extLst>
-            </a:blip>
-            <a:stretch>
-              <a:fillRect/>
-            </a:stretch>
-          </a:blipFill>
-        </p:spPr>
-      </p:sp>
-      <p:grpSp>
-        <p:nvGrpSpPr>
-          <p:cNvPr id="5" name="Group 5"/>
-          <p:cNvGrpSpPr/>
-          <p:nvPr/>
-        </p:nvGrpSpPr>
-        <p:grpSpPr>
-          <a:xfrm>
-            <a:off x="15859155" y="0"/>
-            <a:ext cx="1562612" cy="1673225"/>
-            <a:chOff x="0" y="0"/>
-            <a:chExt cx="2083482" cy="2230967"/>
-          </a:xfrm>
-        </p:grpSpPr>
-        <p:grpSp>
-          <p:nvGrpSpPr>
-            <p:cNvPr id="6" name="Group 6"/>
-            <p:cNvGrpSpPr/>
-            <p:nvPr/>
-          </p:nvGrpSpPr>
-          <p:grpSpPr>
-            <a:xfrm>
-              <a:off x="75599" y="0"/>
-              <a:ext cx="1932284" cy="2230967"/>
-              <a:chOff x="0" y="0"/>
-              <a:chExt cx="703982" cy="812800"/>
-            </a:xfrm>
-          </p:grpSpPr>
-          <p:sp>
-            <p:nvSpPr>
-              <p:cNvPr id="7" name="Freeform 7"/>
-              <p:cNvSpPr/>
-              <p:nvPr/>
-            </p:nvSpPr>
-            <p:spPr>
-              <a:xfrm>
-                <a:off x="0" y="0"/>
-                <a:ext cx="703982" cy="812800"/>
-              </a:xfrm>
-              <a:custGeom>
-                <a:avLst/>
-                <a:gdLst/>
-                <a:ahLst/>
-                <a:cxnLst/>
-                <a:rect l="l" t="t" r="r" b="b"/>
-                <a:pathLst>
-                  <a:path w="703982" h="812800">
-                    <a:moveTo>
-                      <a:pt x="234787" y="793731"/>
-                    </a:moveTo>
-                    <a:cubicBezTo>
-                      <a:pt x="270879" y="805245"/>
-                      <a:pt x="311910" y="812800"/>
-                      <a:pt x="352180" y="812800"/>
-                    </a:cubicBezTo>
-                    <a:cubicBezTo>
-                      <a:pt x="392452" y="812800"/>
-                      <a:pt x="431204" y="806323"/>
-                      <a:pt x="466915" y="794809"/>
-                    </a:cubicBezTo>
-                    <a:cubicBezTo>
-                      <a:pt x="467675" y="794450"/>
-                      <a:pt x="468435" y="794450"/>
-                      <a:pt x="469194" y="794090"/>
-                    </a:cubicBezTo>
-                    <a:cubicBezTo>
-                      <a:pt x="603304" y="748035"/>
-                      <a:pt x="702082" y="626421"/>
-                      <a:pt x="703982" y="484298"/>
-                    </a:cubicBezTo>
-                    <a:lnTo>
-                      <a:pt x="703982" y="0"/>
-                    </a:lnTo>
-                    <a:lnTo>
-                      <a:pt x="0" y="0"/>
-                    </a:lnTo>
-                    <a:lnTo>
-                      <a:pt x="0" y="483939"/>
-                    </a:lnTo>
-                    <a:cubicBezTo>
-                      <a:pt x="1900" y="627140"/>
-                      <a:pt x="99158" y="748755"/>
-                      <a:pt x="234787" y="793731"/>
-                    </a:cubicBezTo>
-                    <a:close/>
-                  </a:path>
-                </a:pathLst>
-              </a:custGeom>
-              <a:solidFill>
-                <a:srgbClr val="9FC3D0"/>
-              </a:solidFill>
-            </p:spPr>
-          </p:sp>
-          <p:sp>
-            <p:nvSpPr>
-              <p:cNvPr id="8" name="TextBox 8"/>
-              <p:cNvSpPr txBox="1"/>
-              <p:nvPr/>
-            </p:nvSpPr>
-            <p:spPr>
-              <a:xfrm>
-                <a:off x="0" y="-47625"/>
-                <a:ext cx="703982" cy="733425"/>
-              </a:xfrm>
-              <a:prstGeom prst="rect">
-                <a:avLst/>
-              </a:prstGeom>
-            </p:spPr>
-            <p:txBody>
-              <a:bodyPr lIns="50800" tIns="50800" rIns="50800" bIns="50800" rtlCol="0" anchor="ctr"/>
-              <a:lstStyle/>
-              <a:p>
-                <a:pPr algn="ctr">
-                  <a:lnSpc>
-                    <a:spcPts val="2659"/>
-                  </a:lnSpc>
-                </a:pPr>
-                <a:endParaRPr/>
-              </a:p>
-            </p:txBody>
-          </p:sp>
-        </p:grpSp>
-        <p:sp>
-          <p:nvSpPr>
-            <p:cNvPr id="9" name="TextBox 9"/>
-            <p:cNvSpPr txBox="1"/>
-            <p:nvPr/>
-          </p:nvSpPr>
-          <p:spPr>
-            <a:xfrm>
-              <a:off x="0" y="437582"/>
-              <a:ext cx="2083482" cy="1241504"/>
-            </a:xfrm>
-            <a:prstGeom prst="rect">
-              <a:avLst/>
-            </a:prstGeom>
-          </p:spPr>
-          <p:txBody>
-            <a:bodyPr lIns="0" tIns="0" rIns="0" bIns="0" rtlCol="0" anchor="t">
-              <a:spAutoFit/>
-            </a:bodyPr>
-            <a:lstStyle/>
-            <a:p>
-              <a:pPr algn="ctr">
-                <a:lnSpc>
-                  <a:spcPts val="7805"/>
-                </a:lnSpc>
-              </a:pPr>
-              <a:r>
-                <a:rPr lang="en-US" sz="5575" b="1">
-                  <a:solidFill>
-                    <a:srgbClr val="000000"/>
-                  </a:solidFill>
-                  <a:latin typeface="Open Sans Bold"/>
-                  <a:ea typeface="Open Sans Bold"/>
-                  <a:cs typeface="Open Sans Bold"/>
-                  <a:sym typeface="Open Sans Bold"/>
-                </a:rPr>
-                <a:t>6</a:t>
-              </a:r>
-            </a:p>
-          </p:txBody>
-        </p:sp>
-      </p:grpSp>
-      <p:sp>
-        <p:nvSpPr>
-          <p:cNvPr id="10" name="Freeform 10"/>
-          <p:cNvSpPr/>
-          <p:nvPr/>
-        </p:nvSpPr>
-        <p:spPr>
-          <a:xfrm>
-            <a:off x="-2628900" y="-1449083"/>
-            <a:ext cx="7315200" cy="2477783"/>
-          </a:xfrm>
-          <a:custGeom>
-            <a:avLst/>
-            <a:gdLst/>
-            <a:ahLst/>
-            <a:cxnLst/>
-            <a:rect l="l" t="t" r="r" b="b"/>
-            <a:pathLst>
-              <a:path w="7315200" h="2477783">
-                <a:moveTo>
-                  <a:pt x="0" y="0"/>
-                </a:moveTo>
-                <a:lnTo>
-                  <a:pt x="7315200" y="0"/>
-                </a:lnTo>
-                <a:lnTo>
-                  <a:pt x="7315200" y="2477783"/>
-                </a:lnTo>
-                <a:lnTo>
-                  <a:pt x="0" y="2477783"/>
-                </a:lnTo>
-                <a:lnTo>
-                  <a:pt x="0" y="0"/>
-                </a:lnTo>
-                <a:close/>
-              </a:path>
-            </a:pathLst>
-          </a:custGeom>
-          <a:blipFill>
-            <a:blip r:embed="rId2">
-              <a:extLst>
-                <a:ext uri="{96DAC541-7B7A-43D3-8B79-37D633B846F1}">
-                  <asvg:svgBlip xmlns="" xmlns:asvg="http://schemas.microsoft.com/office/drawing/2016/SVG/main" r:embed="rId3"/>
-                </a:ext>
-              </a:extLst>
-            </a:blip>
-            <a:stretch>
-              <a:fillRect/>
-            </a:stretch>
-          </a:blipFill>
-        </p:spPr>
-      </p:sp>
-    </p:spTree>
-  </p:cSld>
-  <p:clrMapOvr>
-    <a:masterClrMapping/>
-  </p:clrMapOvr>
-</p:sld>
-</file>
-
-<file path=ppt/slides/slide9.xml><?xml version="1.0" encoding="utf-8"?>
-<p:sld xmlns:a="http://schemas.openxmlformats.org/drawingml/2006/main" xmlns:r="http://schemas.openxmlformats.org/officeDocument/2006/relationships" xmlns:p="http://schemas.openxmlformats.org/presentationml/2006/main">
-  <p:cSld>
-    <p:bg>
-      <p:bgPr>
-        <a:solidFill>
-          <a:srgbClr val="F6F3EB"/>
-        </a:solidFill>
-        <a:effectLst/>
-      </p:bgPr>
-    </p:bg>
-    <p:spTree>
-      <p:nvGrpSpPr>
-        <p:cNvPr id="1" name=""/>
-        <p:cNvGrpSpPr/>
-        <p:nvPr/>
-      </p:nvGrpSpPr>
-      <p:grpSpPr>
-        <a:xfrm>
-          <a:off x="0" y="0"/>
-          <a:ext cx="0" cy="0"/>
-          <a:chOff x="0" y="0"/>
-          <a:chExt cx="0" cy="0"/>
-        </a:xfrm>
-      </p:grpSpPr>
-      <p:sp>
-        <p:nvSpPr>
-          <p:cNvPr id="2" name="TextBox 2"/>
-          <p:cNvSpPr txBox="1"/>
-          <p:nvPr/>
-        </p:nvSpPr>
-        <p:spPr>
-          <a:xfrm>
-            <a:off x="1028700" y="-276225"/>
-            <a:ext cx="16230600" cy="1353179"/>
-          </a:xfrm>
-          <a:prstGeom prst="rect">
-            <a:avLst/>
-          </a:prstGeom>
-        </p:spPr>
-        <p:txBody>
-          <a:bodyPr lIns="0" tIns="0" rIns="0" bIns="0" rtlCol="0" anchor="t">
-            <a:spAutoFit/>
-          </a:bodyPr>
-          <a:lstStyle/>
-          <a:p>
-            <a:pPr algn="ctr">
-              <a:lnSpc>
-                <a:spcPts val="9940"/>
-              </a:lnSpc>
-            </a:pPr>
-            <a:r>
-              <a:rPr lang="en-US" sz="7100" b="1">
-                <a:solidFill>
-                  <a:srgbClr val="000000"/>
-                </a:solidFill>
-                <a:latin typeface="Times New Roman MT Bold"/>
-                <a:ea typeface="Times New Roman MT Bold"/>
-                <a:cs typeface="Times New Roman MT Bold"/>
-                <a:sym typeface="Times New Roman MT Bold"/>
-              </a:rPr>
-              <a:t>MODEL TRAINING</a:t>
-            </a:r>
-          </a:p>
-        </p:txBody>
-      </p:sp>
-      <p:sp>
-        <p:nvSpPr>
-          <p:cNvPr id="3" name="Freeform 3"/>
-          <p:cNvSpPr/>
-          <p:nvPr/>
-        </p:nvSpPr>
-        <p:spPr>
-          <a:xfrm>
-            <a:off x="13417488" y="6142174"/>
-            <a:ext cx="7315200" cy="2477783"/>
-          </a:xfrm>
-          <a:custGeom>
-            <a:avLst/>
-            <a:gdLst/>
-            <a:ahLst/>
-            <a:cxnLst/>
-            <a:rect l="l" t="t" r="r" b="b"/>
-            <a:pathLst>
-              <a:path w="7315200" h="2477783">
-                <a:moveTo>
-                  <a:pt x="0" y="0"/>
-                </a:moveTo>
-                <a:lnTo>
-                  <a:pt x="7315200" y="0"/>
-                </a:lnTo>
-                <a:lnTo>
-                  <a:pt x="7315200" y="2477783"/>
-                </a:lnTo>
-                <a:lnTo>
-                  <a:pt x="0" y="2477783"/>
-                </a:lnTo>
-                <a:lnTo>
-                  <a:pt x="0" y="0"/>
-                </a:lnTo>
-                <a:close/>
-              </a:path>
-            </a:pathLst>
-          </a:custGeom>
-          <a:blipFill>
-            <a:blip r:embed="rId2">
-              <a:extLst>
-                <a:ext uri="{96DAC541-7B7A-43D3-8B79-37D633B846F1}">
-                  <asvg:svgBlip xmlns="" xmlns:asvg="http://schemas.microsoft.com/office/drawing/2016/SVG/main" r:embed="rId3"/>
-                </a:ext>
-              </a:extLst>
-            </a:blip>
-            <a:stretch>
-              <a:fillRect/>
-            </a:stretch>
-          </a:blipFill>
-        </p:spPr>
-      </p:sp>
-      <p:grpSp>
-        <p:nvGrpSpPr>
-          <p:cNvPr id="4" name="Group 4"/>
-          <p:cNvGrpSpPr/>
-          <p:nvPr/>
-        </p:nvGrpSpPr>
-        <p:grpSpPr>
-          <a:xfrm>
-            <a:off x="15859155" y="0"/>
-            <a:ext cx="1562612" cy="1673225"/>
-            <a:chOff x="0" y="0"/>
-            <a:chExt cx="2083482" cy="2230967"/>
-          </a:xfrm>
-        </p:grpSpPr>
-        <p:grpSp>
-          <p:nvGrpSpPr>
-            <p:cNvPr id="5" name="Group 5"/>
-            <p:cNvGrpSpPr/>
-            <p:nvPr/>
-          </p:nvGrpSpPr>
-          <p:grpSpPr>
-            <a:xfrm>
-              <a:off x="75599" y="0"/>
-              <a:ext cx="1932284" cy="2230967"/>
-              <a:chOff x="0" y="0"/>
-              <a:chExt cx="703982" cy="812800"/>
-            </a:xfrm>
-          </p:grpSpPr>
-          <p:sp>
-            <p:nvSpPr>
-              <p:cNvPr id="6" name="Freeform 6"/>
-              <p:cNvSpPr/>
-              <p:nvPr/>
-            </p:nvSpPr>
-            <p:spPr>
-              <a:xfrm>
-                <a:off x="0" y="0"/>
-                <a:ext cx="703982" cy="812800"/>
-              </a:xfrm>
-              <a:custGeom>
-                <a:avLst/>
-                <a:gdLst/>
-                <a:ahLst/>
-                <a:cxnLst/>
-                <a:rect l="l" t="t" r="r" b="b"/>
-                <a:pathLst>
-                  <a:path w="703982" h="812800">
-                    <a:moveTo>
-                      <a:pt x="234787" y="793731"/>
-                    </a:moveTo>
-                    <a:cubicBezTo>
-                      <a:pt x="270879" y="805245"/>
-                      <a:pt x="311910" y="812800"/>
-                      <a:pt x="352180" y="812800"/>
-                    </a:cubicBezTo>
-                    <a:cubicBezTo>
-                      <a:pt x="392452" y="812800"/>
-                      <a:pt x="431204" y="806323"/>
-                      <a:pt x="466915" y="794809"/>
-                    </a:cubicBezTo>
-                    <a:cubicBezTo>
-                      <a:pt x="467675" y="794450"/>
-                      <a:pt x="468435" y="794450"/>
-                      <a:pt x="469194" y="794090"/>
-                    </a:cubicBezTo>
-                    <a:cubicBezTo>
-                      <a:pt x="603304" y="748035"/>
-                      <a:pt x="702082" y="626421"/>
-                      <a:pt x="703982" y="484298"/>
-                    </a:cubicBezTo>
-                    <a:lnTo>
-                      <a:pt x="703982" y="0"/>
-                    </a:lnTo>
-                    <a:lnTo>
-                      <a:pt x="0" y="0"/>
-                    </a:lnTo>
-                    <a:lnTo>
-                      <a:pt x="0" y="483939"/>
-                    </a:lnTo>
-                    <a:cubicBezTo>
-                      <a:pt x="1900" y="627140"/>
-                      <a:pt x="99158" y="748755"/>
-                      <a:pt x="234787" y="793731"/>
-                    </a:cubicBezTo>
-                    <a:close/>
-                  </a:path>
-                </a:pathLst>
-              </a:custGeom>
-              <a:solidFill>
-                <a:srgbClr val="9FC3D0"/>
-              </a:solidFill>
-            </p:spPr>
-          </p:sp>
-          <p:sp>
-            <p:nvSpPr>
-              <p:cNvPr id="7" name="TextBox 7"/>
-              <p:cNvSpPr txBox="1"/>
-              <p:nvPr/>
-            </p:nvSpPr>
-            <p:spPr>
-              <a:xfrm>
-                <a:off x="0" y="-47625"/>
-                <a:ext cx="703982" cy="733425"/>
-              </a:xfrm>
-              <a:prstGeom prst="rect">
-                <a:avLst/>
-              </a:prstGeom>
-            </p:spPr>
-            <p:txBody>
-              <a:bodyPr lIns="50800" tIns="50800" rIns="50800" bIns="50800" rtlCol="0" anchor="ctr"/>
-              <a:lstStyle/>
-              <a:p>
-                <a:pPr algn="ctr">
-                  <a:lnSpc>
-                    <a:spcPts val="2659"/>
-                  </a:lnSpc>
-                </a:pPr>
-                <a:endParaRPr/>
-              </a:p>
-            </p:txBody>
-          </p:sp>
-        </p:grpSp>
-        <p:sp>
-          <p:nvSpPr>
-            <p:cNvPr id="8" name="TextBox 8"/>
-            <p:cNvSpPr txBox="1"/>
-            <p:nvPr/>
-          </p:nvSpPr>
-          <p:spPr>
-            <a:xfrm>
-              <a:off x="0" y="437582"/>
-              <a:ext cx="2083482" cy="1241504"/>
-            </a:xfrm>
-            <a:prstGeom prst="rect">
-              <a:avLst/>
-            </a:prstGeom>
-          </p:spPr>
-          <p:txBody>
-            <a:bodyPr lIns="0" tIns="0" rIns="0" bIns="0" rtlCol="0" anchor="t">
-              <a:spAutoFit/>
-            </a:bodyPr>
-            <a:lstStyle/>
-            <a:p>
-              <a:pPr algn="ctr">
-                <a:lnSpc>
-                  <a:spcPts val="7805"/>
-                </a:lnSpc>
-              </a:pPr>
-              <a:r>
-                <a:rPr lang="en-US" sz="5575" b="1">
-                  <a:solidFill>
-                    <a:srgbClr val="000000"/>
-                  </a:solidFill>
-                  <a:latin typeface="Open Sans Bold"/>
-                  <a:ea typeface="Open Sans Bold"/>
-                  <a:cs typeface="Open Sans Bold"/>
-                  <a:sym typeface="Open Sans Bold"/>
-                </a:rPr>
-                <a:t>7</a:t>
-              </a:r>
-            </a:p>
-          </p:txBody>
-        </p:sp>
-      </p:grpSp>
-      <p:sp>
-        <p:nvSpPr>
-          <p:cNvPr id="9" name="TextBox 9"/>
-          <p:cNvSpPr txBox="1"/>
-          <p:nvPr/>
-        </p:nvSpPr>
-        <p:spPr>
-          <a:xfrm>
-            <a:off x="839777" y="943604"/>
-            <a:ext cx="16235311" cy="9648191"/>
-          </a:xfrm>
-          <a:prstGeom prst="rect">
-            <a:avLst/>
-          </a:prstGeom>
-        </p:spPr>
-        <p:txBody>
-          <a:bodyPr lIns="0" tIns="0" rIns="0" bIns="0" rtlCol="0" anchor="t">
-            <a:spAutoFit/>
-          </a:bodyPr>
-          <a:lstStyle/>
-          <a:p>
-            <a:pPr algn="l">
-              <a:lnSpc>
-                <a:spcPts val="4759"/>
-              </a:lnSpc>
-            </a:pPr>
-            <a:r>
-              <a:rPr lang="en-US" sz="3399" b="1">
-                <a:solidFill>
-                  <a:srgbClr val="000000"/>
-                </a:solidFill>
-                <a:latin typeface="Times New Roman MT Bold"/>
-                <a:ea typeface="Times New Roman MT Bold"/>
-                <a:cs typeface="Times New Roman MT Bold"/>
-                <a:sym typeface="Times New Roman MT Bold"/>
-              </a:rPr>
-              <a:t>Model Used:</a:t>
-            </a:r>
-          </a:p>
-          <a:p>
-            <a:pPr marL="734051" lvl="1" indent="-367026" algn="l">
-              <a:lnSpc>
-                <a:spcPts val="4759"/>
-              </a:lnSpc>
-              <a:spcBef>
-                <a:spcPct val="0"/>
-              </a:spcBef>
-              <a:buFont typeface="Arial"/>
-              <a:buChar char="•"/>
-            </a:pPr>
-            <a:r>
-              <a:rPr lang="en-US" sz="3399">
-                <a:solidFill>
-                  <a:srgbClr val="000000"/>
-                </a:solidFill>
-                <a:latin typeface="Times New Roman MT"/>
-                <a:ea typeface="Times New Roman MT"/>
-                <a:cs typeface="Times New Roman MT"/>
-                <a:sym typeface="Times New Roman MT"/>
-              </a:rPr>
-              <a:t>EfficientNet-B4 from PyTorch (torchvision.models) with ImageNet pretrained weights.</a:t>
-            </a:r>
-          </a:p>
-          <a:p>
-            <a:pPr marL="734051" lvl="1" indent="-367026" algn="l">
-              <a:lnSpc>
-                <a:spcPts val="4759"/>
-              </a:lnSpc>
-              <a:spcBef>
-                <a:spcPct val="0"/>
-              </a:spcBef>
-              <a:buFont typeface="Arial"/>
-              <a:buChar char="•"/>
-            </a:pPr>
-            <a:r>
-              <a:rPr lang="en-US" sz="3399">
-                <a:solidFill>
-                  <a:srgbClr val="000000"/>
-                </a:solidFill>
-                <a:latin typeface="Times New Roman MT"/>
-                <a:ea typeface="Times New Roman MT"/>
-                <a:cs typeface="Times New Roman MT"/>
-                <a:sym typeface="Times New Roman MT"/>
-              </a:rPr>
-              <a:t>Modified the classifier layer for number of PCB defect classes.</a:t>
-            </a:r>
-          </a:p>
-          <a:p>
-            <a:pPr algn="l">
-              <a:lnSpc>
-                <a:spcPts val="4759"/>
-              </a:lnSpc>
-              <a:spcBef>
-                <a:spcPct val="0"/>
-              </a:spcBef>
-            </a:pPr>
-            <a:r>
-              <a:rPr lang="en-US" sz="3399" b="1">
-                <a:solidFill>
-                  <a:srgbClr val="000000"/>
-                </a:solidFill>
-                <a:latin typeface="Times New Roman MT Bold"/>
-                <a:ea typeface="Times New Roman MT Bold"/>
-                <a:cs typeface="Times New Roman MT Bold"/>
-                <a:sym typeface="Times New Roman MT Bold"/>
-              </a:rPr>
-              <a:t>Dataset &amp; Preprocessing:</a:t>
-            </a:r>
-          </a:p>
-          <a:p>
-            <a:pPr marL="734051" lvl="1" indent="-367026" algn="l">
-              <a:lnSpc>
-                <a:spcPts val="4759"/>
-              </a:lnSpc>
-              <a:spcBef>
-                <a:spcPct val="0"/>
-              </a:spcBef>
-              <a:buFont typeface="Arial"/>
-              <a:buChar char="•"/>
-            </a:pPr>
-            <a:r>
-              <a:rPr lang="en-US" sz="3399">
-                <a:solidFill>
-                  <a:srgbClr val="000000"/>
-                </a:solidFill>
-                <a:latin typeface="Times New Roman MT"/>
-                <a:ea typeface="Times New Roman MT"/>
-                <a:cs typeface="Times New Roman MT"/>
-                <a:sym typeface="Times New Roman MT"/>
-              </a:rPr>
-              <a:t>Input: 128×128 cropped defect ROIs.</a:t>
-            </a:r>
-          </a:p>
-          <a:p>
-            <a:pPr marL="734051" lvl="1" indent="-367026" algn="l">
-              <a:lnSpc>
-                <a:spcPts val="4759"/>
-              </a:lnSpc>
-              <a:spcBef>
-                <a:spcPct val="0"/>
-              </a:spcBef>
-              <a:buFont typeface="Arial"/>
-              <a:buChar char="•"/>
-            </a:pPr>
-            <a:r>
-              <a:rPr lang="en-US" sz="3399">
-                <a:solidFill>
-                  <a:srgbClr val="000000"/>
-                </a:solidFill>
-                <a:latin typeface="Times New Roman MT"/>
-                <a:ea typeface="Times New Roman MT"/>
-                <a:cs typeface="Times New Roman MT"/>
-                <a:sym typeface="Times New Roman MT"/>
-              </a:rPr>
-              <a:t>Data augmentation for training</a:t>
-            </a:r>
-          </a:p>
-          <a:p>
-            <a:pPr marL="734051" lvl="1" indent="-367026" algn="l">
-              <a:lnSpc>
-                <a:spcPts val="4759"/>
-              </a:lnSpc>
-              <a:spcBef>
-                <a:spcPct val="0"/>
-              </a:spcBef>
-              <a:buFont typeface="Arial"/>
-              <a:buChar char="•"/>
-            </a:pPr>
-            <a:r>
-              <a:rPr lang="en-US" sz="3399">
-                <a:solidFill>
-                  <a:srgbClr val="000000"/>
-                </a:solidFill>
-                <a:latin typeface="Times New Roman MT"/>
-                <a:ea typeface="Times New Roman MT"/>
-                <a:cs typeface="Times New Roman MT"/>
-                <a:sym typeface="Times New Roman MT"/>
-              </a:rPr>
-              <a:t>Normalization applied to all images.</a:t>
-            </a:r>
-          </a:p>
-          <a:p>
-            <a:pPr marL="734051" lvl="1" indent="-367026" algn="l">
-              <a:lnSpc>
-                <a:spcPts val="4759"/>
-              </a:lnSpc>
-              <a:spcBef>
-                <a:spcPct val="0"/>
-              </a:spcBef>
-              <a:buFont typeface="Arial"/>
-              <a:buChar char="•"/>
-            </a:pPr>
-            <a:r>
-              <a:rPr lang="en-US" sz="3399">
-                <a:solidFill>
-                  <a:srgbClr val="000000"/>
-                </a:solidFill>
-                <a:latin typeface="Times New Roman MT"/>
-                <a:ea typeface="Times New Roman MT"/>
-                <a:cs typeface="Times New Roman MT"/>
-                <a:sym typeface="Times New Roman MT"/>
-              </a:rPr>
-              <a:t>Train-validation split: 80%-20% (stratified by defect class).</a:t>
-            </a:r>
-          </a:p>
-          <a:p>
-            <a:pPr algn="l">
-              <a:lnSpc>
-                <a:spcPts val="4759"/>
-              </a:lnSpc>
-              <a:spcBef>
-                <a:spcPct val="0"/>
-              </a:spcBef>
-            </a:pPr>
-            <a:r>
-              <a:rPr lang="en-US" sz="3399" b="1">
-                <a:solidFill>
-                  <a:srgbClr val="000000"/>
-                </a:solidFill>
-                <a:latin typeface="Times New Roman MT Bold"/>
-                <a:ea typeface="Times New Roman MT Bold"/>
-                <a:cs typeface="Times New Roman MT Bold"/>
-                <a:sym typeface="Times New Roman MT Bold"/>
-              </a:rPr>
-              <a:t>Training Details:</a:t>
-            </a:r>
-          </a:p>
-          <a:p>
-            <a:pPr marL="734051" lvl="1" indent="-367026" algn="l">
-              <a:lnSpc>
-                <a:spcPts val="4759"/>
-              </a:lnSpc>
-              <a:spcBef>
-                <a:spcPct val="0"/>
-              </a:spcBef>
-              <a:buFont typeface="Arial"/>
-              <a:buChar char="•"/>
-            </a:pPr>
-            <a:r>
-              <a:rPr lang="en-US" sz="3399">
-                <a:solidFill>
-                  <a:srgbClr val="000000"/>
-                </a:solidFill>
-                <a:latin typeface="Times New Roman MT"/>
-                <a:ea typeface="Times New Roman MT"/>
-                <a:cs typeface="Times New Roman MT"/>
-                <a:sym typeface="Times New Roman MT"/>
-              </a:rPr>
-              <a:t>Optimizer: AdamW</a:t>
-            </a:r>
-          </a:p>
-          <a:p>
-            <a:pPr marL="734051" lvl="1" indent="-367026" algn="l">
-              <a:lnSpc>
-                <a:spcPts val="4759"/>
-              </a:lnSpc>
-              <a:spcBef>
-                <a:spcPct val="0"/>
-              </a:spcBef>
-              <a:buFont typeface="Arial"/>
-              <a:buChar char="•"/>
-            </a:pPr>
-            <a:r>
-              <a:rPr lang="en-US" sz="3399">
-                <a:solidFill>
-                  <a:srgbClr val="000000"/>
-                </a:solidFill>
-                <a:latin typeface="Times New Roman MT"/>
-                <a:ea typeface="Times New Roman MT"/>
-                <a:cs typeface="Times New Roman MT"/>
-                <a:sym typeface="Times New Roman MT"/>
-              </a:rPr>
-              <a:t>Loss Function: Cross-Entropy with label smoothing</a:t>
-            </a:r>
-          </a:p>
-          <a:p>
-            <a:pPr marL="734051" lvl="1" indent="-367026" algn="l">
-              <a:lnSpc>
-                <a:spcPts val="4759"/>
-              </a:lnSpc>
-              <a:spcBef>
-                <a:spcPct val="0"/>
-              </a:spcBef>
-              <a:buFont typeface="Arial"/>
-              <a:buChar char="•"/>
-            </a:pPr>
-            <a:r>
-              <a:rPr lang="en-US" sz="3399">
-                <a:solidFill>
-                  <a:srgbClr val="000000"/>
-                </a:solidFill>
-                <a:latin typeface="Times New Roman MT"/>
-                <a:ea typeface="Times New Roman MT"/>
-                <a:cs typeface="Times New Roman MT"/>
-                <a:sym typeface="Times New Roman MT"/>
-              </a:rPr>
-              <a:t>Scheduler: Cosine Annealing LR</a:t>
-            </a:r>
-          </a:p>
-          <a:p>
-            <a:pPr marL="734051" lvl="1" indent="-367026" algn="l">
-              <a:lnSpc>
-                <a:spcPts val="4759"/>
-              </a:lnSpc>
-              <a:spcBef>
-                <a:spcPct val="0"/>
-              </a:spcBef>
-              <a:buFont typeface="Arial"/>
-              <a:buChar char="•"/>
-            </a:pPr>
-            <a:r>
-              <a:rPr lang="en-US" sz="3399">
-                <a:solidFill>
-                  <a:srgbClr val="000000"/>
-                </a:solidFill>
-                <a:latin typeface="Times New Roman MT"/>
-                <a:ea typeface="Times New Roman MT"/>
-                <a:cs typeface="Times New Roman MT"/>
-                <a:sym typeface="Times New Roman MT"/>
-              </a:rPr>
-              <a:t>Mixed Precision Training: autocast + GradScaler for speed &amp; GPU efficiency</a:t>
-            </a:r>
-          </a:p>
-          <a:p>
-            <a:pPr marL="734051" lvl="1" indent="-367026" algn="l">
-              <a:lnSpc>
-                <a:spcPts val="4759"/>
-              </a:lnSpc>
-              <a:spcBef>
-                <a:spcPct val="0"/>
-              </a:spcBef>
-              <a:buFont typeface="Arial"/>
-              <a:buChar char="•"/>
-            </a:pPr>
-            <a:r>
-              <a:rPr lang="en-US" sz="3399">
-                <a:solidFill>
-                  <a:srgbClr val="000000"/>
-                </a:solidFill>
-                <a:latin typeface="Times New Roman MT"/>
-                <a:ea typeface="Times New Roman MT"/>
-                <a:cs typeface="Times New Roman MT"/>
-                <a:sym typeface="Times New Roman MT"/>
-              </a:rPr>
-              <a:t>Early stopping: Patience = 5 epochs (to avoid overfitting)</a:t>
-            </a:r>
-          </a:p>
-          <a:p>
-            <a:pPr algn="l">
-              <a:lnSpc>
-                <a:spcPts val="4759"/>
-              </a:lnSpc>
-              <a:spcBef>
-                <a:spcPct val="0"/>
-              </a:spcBef>
-            </a:pPr>
-            <a:endParaRPr/>
-          </a:p>
-        </p:txBody>
-      </p:sp>
-    </p:spTree>
-  </p:cSld>
-  <p:clrMapOvr>
-    <a:masterClrMapping/>
-  </p:clrMapOvr>
-</p:sld>
-</file>
-
 <file path=ppt/theme/theme1.xml><?xml version="1.0" encoding="utf-8"?>
 <a:theme xmlns:a="http://schemas.openxmlformats.org/drawingml/2006/main" name="Office Theme">
   <a:themeElements>
